--- a/public/lessons/year-6-maths/summer/week-27/reason-about-transformations/teaching-powerpoint-v1.pptx
+++ b/public/lessons/year-6-maths/summer/week-27/reason-about-transformations/teaching-powerpoint-v1.pptx
@@ -2,24 +2,24 @@
 <file path=ppt/presentation.xml><?xml version="1.0" encoding="utf-8"?>
 <p:presentation xmlns:p="http://schemas.openxmlformats.org/presentationml/2006/main">
   <p:sldMasterIdLst>
-    <p:sldMasterId xmlns:r="http://schemas.openxmlformats.org/officeDocument/2006/relationships" id="2147483648" r:id="Rebd5e9a722b648b2"/>
+    <p:sldMasterId xmlns:r="http://schemas.openxmlformats.org/officeDocument/2006/relationships" id="2147483648" r:id="R4fa4858a98c84514"/>
   </p:sldMasterIdLst>
   <p:notesMasterIdLst>
-    <p:notesMasterId xmlns:r="http://schemas.openxmlformats.org/officeDocument/2006/relationships" r:id="Rf4a1e8e7443c4281"/>
+    <p:notesMasterId xmlns:r="http://schemas.openxmlformats.org/officeDocument/2006/relationships" r:id="Raa6a7154f8d54ad5"/>
   </p:notesMasterIdLst>
   <p:sldIdLst>
-    <p:sldId xmlns:r="http://schemas.openxmlformats.org/officeDocument/2006/relationships" id="256" r:id="R387383ca66e842c2"/>
-    <p:sldId xmlns:r="http://schemas.openxmlformats.org/officeDocument/2006/relationships" id="257" r:id="Re163a077f127428d"/>
-    <p:sldId xmlns:r="http://schemas.openxmlformats.org/officeDocument/2006/relationships" id="258" r:id="R27f63814db9b4612"/>
-    <p:sldId xmlns:r="http://schemas.openxmlformats.org/officeDocument/2006/relationships" id="259" r:id="R4233ac6421da43f8"/>
-    <p:sldId xmlns:r="http://schemas.openxmlformats.org/officeDocument/2006/relationships" id="260" r:id="Rf77847682f8147b5"/>
-    <p:sldId xmlns:r="http://schemas.openxmlformats.org/officeDocument/2006/relationships" id="261" r:id="R45517ea0c6444030"/>
-    <p:sldId xmlns:r="http://schemas.openxmlformats.org/officeDocument/2006/relationships" id="262" r:id="Rb80434eeeec345a8"/>
-    <p:sldId xmlns:r="http://schemas.openxmlformats.org/officeDocument/2006/relationships" id="263" r:id="R3f93bf7a6d9a48bd"/>
-    <p:sldId xmlns:r="http://schemas.openxmlformats.org/officeDocument/2006/relationships" id="264" r:id="R14ac01c883a54d9d"/>
-    <p:sldId xmlns:r="http://schemas.openxmlformats.org/officeDocument/2006/relationships" id="265" r:id="Rec1a9e0727664ed8"/>
-    <p:sldId xmlns:r="http://schemas.openxmlformats.org/officeDocument/2006/relationships" id="266" r:id="R6234ed6d80d5492a"/>
-    <p:sldId xmlns:r="http://schemas.openxmlformats.org/officeDocument/2006/relationships" id="267" r:id="R5078cde78d554464"/>
+    <p:sldId xmlns:r="http://schemas.openxmlformats.org/officeDocument/2006/relationships" id="256" r:id="Rb7d5b949d60f4d29"/>
+    <p:sldId xmlns:r="http://schemas.openxmlformats.org/officeDocument/2006/relationships" id="257" r:id="R37e7edcafcbb41d2"/>
+    <p:sldId xmlns:r="http://schemas.openxmlformats.org/officeDocument/2006/relationships" id="258" r:id="R227afbd5b32b48b8"/>
+    <p:sldId xmlns:r="http://schemas.openxmlformats.org/officeDocument/2006/relationships" id="259" r:id="R3aabb2c0db71485d"/>
+    <p:sldId xmlns:r="http://schemas.openxmlformats.org/officeDocument/2006/relationships" id="260" r:id="R253260996f834eb8"/>
+    <p:sldId xmlns:r="http://schemas.openxmlformats.org/officeDocument/2006/relationships" id="261" r:id="R6119724727d348e5"/>
+    <p:sldId xmlns:r="http://schemas.openxmlformats.org/officeDocument/2006/relationships" id="262" r:id="R796c22f5949741c7"/>
+    <p:sldId xmlns:r="http://schemas.openxmlformats.org/officeDocument/2006/relationships" id="263" r:id="R9ce68a9b7f734626"/>
+    <p:sldId xmlns:r="http://schemas.openxmlformats.org/officeDocument/2006/relationships" id="264" r:id="R05f837ec97374673"/>
+    <p:sldId xmlns:r="http://schemas.openxmlformats.org/officeDocument/2006/relationships" id="265" r:id="R6644b8867cc64cb1"/>
+    <p:sldId xmlns:r="http://schemas.openxmlformats.org/officeDocument/2006/relationships" id="266" r:id="R763eca1b02b6460d"/>
+    <p:sldId xmlns:r="http://schemas.openxmlformats.org/officeDocument/2006/relationships" id="267" r:id="R7dbaa7fd383e4cad"/>
   </p:sldIdLst>
   <p:sldSz cx="12192000" cy="6858000"/>
   <p:notesSz cx="6858000" cy="9144000"/>
@@ -873,7 +873,7 @@
           <a:lstStyle xmlns:a="http://schemas.openxmlformats.org/drawingml/2006/main"/>
           <a:p xmlns:a="http://schemas.openxmlformats.org/drawingml/2006/main">
             <a:r>
-              <a:t>I do. Reveal the question, setup and each calculation stage one click at a time. Pupils watch before copying. Model answer: (-2, -1).</a:t>
+              <a:t>I do. Reveal the question, then reveal each mathematical change one click at a time. Point to the numbers and operation that changed before moving to the next line. Final answer: (-2, -1).</a:t>
             </a:r>
           </a:p>
         </p:txBody>
@@ -1291,7 +1291,7 @@
   </p:cSld>
   <p:clrMap bg1="lt1" tx1="dk1" bg2="lt2" tx2="dk2" accent1="accent1" accent2="accent2" accent3="accent3" accent4="accent4" accent5="accent5" accent6="accent6" hlink="hlink" folHlink="folHlink"/>
   <p:sldLayoutIdLst>
-    <p:sldLayoutId xmlns:r="http://schemas.openxmlformats.org/officeDocument/2006/relationships" id="2147483649" r:id="Re34abb9a0c56402b"/>
+    <p:sldLayoutId xmlns:r="http://schemas.openxmlformats.org/officeDocument/2006/relationships" id="2147483649" r:id="R42096df3ced649b9"/>
   </p:sldLayoutIdLst>
   <p:txStyles>
     <p:titleStyle>
@@ -1842,7 +1842,7 @@
           <p:cNvPr id="12" name="">
             <a:extLst xmlns:a="http://schemas.openxmlformats.org/drawingml/2006/main">
               <a:ext uri="{FF2B5EF4-FFF2-40B4-BE49-F238E27FC236}">
-                <a16:creationId xmlns:a16="http://schemas.microsoft.com/office/drawing/2014/main" id="{117A7C6C-FC1E-4C0A-9D56-6B30AF3D0022}"/>
+                <a16:creationId xmlns:a16="http://schemas.microsoft.com/office/drawing/2014/main" id="{485A5A1B-37E7-4682-882D-1B3D98A16812}"/>
               </a:ext>
             </a:extLst>
           </p:cNvPr>
@@ -1874,7 +1874,7 @@
           <p:cNvPr id="2" name="">
             <a:extLst xmlns:a="http://schemas.openxmlformats.org/drawingml/2006/main">
               <a:ext uri="{FF2B5EF4-FFF2-40B4-BE49-F238E27FC236}">
-                <a16:creationId xmlns:a16="http://schemas.microsoft.com/office/drawing/2014/main" id="{24B94317-325B-413B-9E94-A8FB5FB4591F}"/>
+                <a16:creationId xmlns:a16="http://schemas.microsoft.com/office/drawing/2014/main" id="{9F0EAF23-7A49-4679-A0C9-E156BFEB0E11}"/>
               </a:ext>
             </a:extLst>
           </p:cNvPr>
@@ -1931,7 +1931,7 @@
           <p:cNvPr id="3" name="">
             <a:extLst xmlns:a="http://schemas.openxmlformats.org/drawingml/2006/main">
               <a:ext uri="{FF2B5EF4-FFF2-40B4-BE49-F238E27FC236}">
-                <a16:creationId xmlns:a16="http://schemas.microsoft.com/office/drawing/2014/main" id="{0C239B46-1A22-4E32-BE78-2E6F68ABDB2A}"/>
+                <a16:creationId xmlns:a16="http://schemas.microsoft.com/office/drawing/2014/main" id="{D3100D0F-83F0-4BCB-A9B1-0907BC8E55AC}"/>
               </a:ext>
             </a:extLst>
           </p:cNvPr>
@@ -1965,7 +1965,7 @@
           <p:cNvPr id="4" name="">
             <a:extLst xmlns:a="http://schemas.openxmlformats.org/drawingml/2006/main">
               <a:ext uri="{FF2B5EF4-FFF2-40B4-BE49-F238E27FC236}">
-                <a16:creationId xmlns:a16="http://schemas.microsoft.com/office/drawing/2014/main" id="{EF427F33-04A2-4944-A7C0-CE07A18D9DE8}"/>
+                <a16:creationId xmlns:a16="http://schemas.microsoft.com/office/drawing/2014/main" id="{3A7010B4-EA56-4CBA-8C52-AE310ED3DC8B}"/>
               </a:ext>
             </a:extLst>
           </p:cNvPr>
@@ -2022,7 +2022,7 @@
           <p:cNvPr id="5" name="">
             <a:extLst xmlns:a="http://schemas.openxmlformats.org/drawingml/2006/main">
               <a:ext uri="{FF2B5EF4-FFF2-40B4-BE49-F238E27FC236}">
-                <a16:creationId xmlns:a16="http://schemas.microsoft.com/office/drawing/2014/main" id="{D9F579A2-2661-4CFA-93F1-DB138AF98B22}"/>
+                <a16:creationId xmlns:a16="http://schemas.microsoft.com/office/drawing/2014/main" id="{7968B692-965E-44E3-9205-9F6B2453AC74}"/>
               </a:ext>
             </a:extLst>
           </p:cNvPr>
@@ -2079,7 +2079,7 @@
           <p:cNvPr id="6" name="">
             <a:extLst xmlns:a="http://schemas.openxmlformats.org/drawingml/2006/main">
               <a:ext uri="{FF2B5EF4-FFF2-40B4-BE49-F238E27FC236}">
-                <a16:creationId xmlns:a16="http://schemas.microsoft.com/office/drawing/2014/main" id="{3555821A-76A2-4E22-9D17-CA24A0194F9E}"/>
+                <a16:creationId xmlns:a16="http://schemas.microsoft.com/office/drawing/2014/main" id="{37283824-03B3-4B1F-85BD-39CF86A72757}"/>
               </a:ext>
             </a:extLst>
           </p:cNvPr>
@@ -2113,7 +2113,7 @@
           <p:cNvPr id="7" name="">
             <a:extLst xmlns:a="http://schemas.openxmlformats.org/drawingml/2006/main">
               <a:ext uri="{FF2B5EF4-FFF2-40B4-BE49-F238E27FC236}">
-                <a16:creationId xmlns:a16="http://schemas.microsoft.com/office/drawing/2014/main" id="{EB796936-43C2-4E9D-9F32-000E82347882}"/>
+                <a16:creationId xmlns:a16="http://schemas.microsoft.com/office/drawing/2014/main" id="{E2A01A37-AD1F-4746-BBC0-E3C8D869F410}"/>
               </a:ext>
             </a:extLst>
           </p:cNvPr>
@@ -2170,7 +2170,7 @@
           <p:cNvPr id="8" name="">
             <a:extLst xmlns:a="http://schemas.openxmlformats.org/drawingml/2006/main">
               <a:ext uri="{FF2B5EF4-FFF2-40B4-BE49-F238E27FC236}">
-                <a16:creationId xmlns:a16="http://schemas.microsoft.com/office/drawing/2014/main" id="{6179E32B-05EF-48A7-9483-89B017B6BD0F}"/>
+                <a16:creationId xmlns:a16="http://schemas.microsoft.com/office/drawing/2014/main" id="{B44EF4C5-A0AE-4175-B76A-1908A1B05F07}"/>
               </a:ext>
             </a:extLst>
           </p:cNvPr>
@@ -2227,7 +2227,7 @@
           <p:cNvPr id="9" name="">
             <a:extLst xmlns:a="http://schemas.openxmlformats.org/drawingml/2006/main">
               <a:ext uri="{FF2B5EF4-FFF2-40B4-BE49-F238E27FC236}">
-                <a16:creationId xmlns:a16="http://schemas.microsoft.com/office/drawing/2014/main" id="{F6DD8A18-C0AE-4222-A46A-CC1380B993CC}"/>
+                <a16:creationId xmlns:a16="http://schemas.microsoft.com/office/drawing/2014/main" id="{CD07E2CA-CC1A-4600-B775-D0436B9085CA}"/>
               </a:ext>
             </a:extLst>
           </p:cNvPr>
@@ -2284,7 +2284,7 @@
           <p:cNvPr id="10" name="">
             <a:extLst xmlns:a="http://schemas.openxmlformats.org/drawingml/2006/main">
               <a:ext uri="{FF2B5EF4-FFF2-40B4-BE49-F238E27FC236}">
-                <a16:creationId xmlns:a16="http://schemas.microsoft.com/office/drawing/2014/main" id="{D45C6C65-C3B7-4E7C-996F-F26186893273}"/>
+                <a16:creationId xmlns:a16="http://schemas.microsoft.com/office/drawing/2014/main" id="{1A406EC4-BF4B-4680-ACF2-E5CA8C6DE34C}"/>
               </a:ext>
             </a:extLst>
           </p:cNvPr>
@@ -2341,7 +2341,7 @@
           <p:cNvPr id="11" name="">
             <a:extLst xmlns:a="http://schemas.openxmlformats.org/drawingml/2006/main">
               <a:ext uri="{FF2B5EF4-FFF2-40B4-BE49-F238E27FC236}">
-                <a16:creationId xmlns:a16="http://schemas.microsoft.com/office/drawing/2014/main" id="{A401F4BF-0695-448F-9F9E-33C02E28F398}"/>
+                <a16:creationId xmlns:a16="http://schemas.microsoft.com/office/drawing/2014/main" id="{2860C53F-D9D4-4DD6-8DE7-5B5B7B17B149}"/>
               </a:ext>
             </a:extLst>
           </p:cNvPr>
@@ -2396,7 +2396,7 @@
     </p:spTree>
     <p:extLst>
       <p:ext uri="{BB962C8B-B14F-4D97-AF65-F5344CB8AC3E}">
-        <p14:creationId xmlns:p14="http://schemas.microsoft.com/office/powerpoint/2010/main" val="2127330201"/>
+        <p14:creationId xmlns:p14="http://schemas.microsoft.com/office/powerpoint/2010/main" val="456210243"/>
       </p:ext>
     </p:extLst>
   </p:cSld>
@@ -2427,7 +2427,7 @@
           <p:cNvPr id="14" name="">
             <a:extLst xmlns:a="http://schemas.openxmlformats.org/drawingml/2006/main">
               <a:ext uri="{FF2B5EF4-FFF2-40B4-BE49-F238E27FC236}">
-                <a16:creationId xmlns:a16="http://schemas.microsoft.com/office/drawing/2014/main" id="{C977F32B-9186-41B0-800E-CE55DA486726}"/>
+                <a16:creationId xmlns:a16="http://schemas.microsoft.com/office/drawing/2014/main" id="{FCCF6E44-26AA-4142-A865-4BC5397F6226}"/>
               </a:ext>
             </a:extLst>
           </p:cNvPr>
@@ -2459,7 +2459,7 @@
           <p:cNvPr id="2" name="">
             <a:extLst xmlns:a="http://schemas.openxmlformats.org/drawingml/2006/main">
               <a:ext uri="{FF2B5EF4-FFF2-40B4-BE49-F238E27FC236}">
-                <a16:creationId xmlns:a16="http://schemas.microsoft.com/office/drawing/2014/main" id="{D7F9D254-5830-4BEE-B66A-927351EA29DD}"/>
+                <a16:creationId xmlns:a16="http://schemas.microsoft.com/office/drawing/2014/main" id="{DED82930-E1AD-42D1-84A0-EE2AFB990E4D}"/>
               </a:ext>
             </a:extLst>
           </p:cNvPr>
@@ -2516,7 +2516,7 @@
           <p:cNvPr id="3" name="">
             <a:extLst xmlns:a="http://schemas.openxmlformats.org/drawingml/2006/main">
               <a:ext uri="{FF2B5EF4-FFF2-40B4-BE49-F238E27FC236}">
-                <a16:creationId xmlns:a16="http://schemas.microsoft.com/office/drawing/2014/main" id="{357AD949-217A-44AC-A235-EB5D2FD988D2}"/>
+                <a16:creationId xmlns:a16="http://schemas.microsoft.com/office/drawing/2014/main" id="{0B3F17DC-B1DC-4634-A428-987E28950AAD}"/>
               </a:ext>
             </a:extLst>
           </p:cNvPr>
@@ -2548,7 +2548,7 @@
           <p:cNvPr id="4" name="">
             <a:extLst xmlns:a="http://schemas.openxmlformats.org/drawingml/2006/main">
               <a:ext uri="{FF2B5EF4-FFF2-40B4-BE49-F238E27FC236}">
-                <a16:creationId xmlns:a16="http://schemas.microsoft.com/office/drawing/2014/main" id="{CE9E2A5F-D8A2-4FF9-965E-03418BE56569}"/>
+                <a16:creationId xmlns:a16="http://schemas.microsoft.com/office/drawing/2014/main" id="{7AE76889-3D26-4AE7-AD30-B92262E901D3}"/>
               </a:ext>
             </a:extLst>
           </p:cNvPr>
@@ -2605,7 +2605,7 @@
           <p:cNvPr id="5" name="">
             <a:extLst xmlns:a="http://schemas.openxmlformats.org/drawingml/2006/main">
               <a:ext uri="{FF2B5EF4-FFF2-40B4-BE49-F238E27FC236}">
-                <a16:creationId xmlns:a16="http://schemas.microsoft.com/office/drawing/2014/main" id="{90ED80BF-71AE-441D-A40B-C75871F46A15}"/>
+                <a16:creationId xmlns:a16="http://schemas.microsoft.com/office/drawing/2014/main" id="{DEC58725-3D9D-4A19-B8C0-DD14E792FFBD}"/>
               </a:ext>
             </a:extLst>
           </p:cNvPr>
@@ -2662,7 +2662,7 @@
           <p:cNvPr id="6" name="">
             <a:extLst xmlns:a="http://schemas.openxmlformats.org/drawingml/2006/main">
               <a:ext uri="{FF2B5EF4-FFF2-40B4-BE49-F238E27FC236}">
-                <a16:creationId xmlns:a16="http://schemas.microsoft.com/office/drawing/2014/main" id="{A9C8470A-4A59-427A-85C4-4C480B32784F}"/>
+                <a16:creationId xmlns:a16="http://schemas.microsoft.com/office/drawing/2014/main" id="{08F1B43D-48FA-4D38-B0E5-76F973A2C0E6}"/>
               </a:ext>
             </a:extLst>
           </p:cNvPr>
@@ -2719,7 +2719,7 @@
           <p:cNvPr id="7" name="">
             <a:extLst xmlns:a="http://schemas.openxmlformats.org/drawingml/2006/main">
               <a:ext uri="{FF2B5EF4-FFF2-40B4-BE49-F238E27FC236}">
-                <a16:creationId xmlns:a16="http://schemas.microsoft.com/office/drawing/2014/main" id="{5CEB19D9-AA66-4258-AD5D-51A47630C46C}"/>
+                <a16:creationId xmlns:a16="http://schemas.microsoft.com/office/drawing/2014/main" id="{E2C4C751-22F5-4C0C-9AB6-41FAC884BB29}"/>
               </a:ext>
             </a:extLst>
           </p:cNvPr>
@@ -2751,7 +2751,7 @@
           <p:cNvPr id="8" name="">
             <a:extLst xmlns:a="http://schemas.openxmlformats.org/drawingml/2006/main">
               <a:ext uri="{FF2B5EF4-FFF2-40B4-BE49-F238E27FC236}">
-                <a16:creationId xmlns:a16="http://schemas.microsoft.com/office/drawing/2014/main" id="{6F1A8481-1473-4ED6-B0B1-D0EFBC294B61}"/>
+                <a16:creationId xmlns:a16="http://schemas.microsoft.com/office/drawing/2014/main" id="{16307886-CA8D-4F7E-89EE-D0B93B3E2923}"/>
               </a:ext>
             </a:extLst>
           </p:cNvPr>
@@ -2808,7 +2808,7 @@
           <p:cNvPr id="9" name="">
             <a:extLst xmlns:a="http://schemas.openxmlformats.org/drawingml/2006/main">
               <a:ext uri="{FF2B5EF4-FFF2-40B4-BE49-F238E27FC236}">
-                <a16:creationId xmlns:a16="http://schemas.microsoft.com/office/drawing/2014/main" id="{139B568A-74BB-4FFC-8699-424F30C3FB0E}"/>
+                <a16:creationId xmlns:a16="http://schemas.microsoft.com/office/drawing/2014/main" id="{35596A03-DC75-4149-84BC-A626A6225339}"/>
               </a:ext>
             </a:extLst>
           </p:cNvPr>
@@ -2865,7 +2865,7 @@
           <p:cNvPr id="10" name="">
             <a:extLst xmlns:a="http://schemas.openxmlformats.org/drawingml/2006/main">
               <a:ext uri="{FF2B5EF4-FFF2-40B4-BE49-F238E27FC236}">
-                <a16:creationId xmlns:a16="http://schemas.microsoft.com/office/drawing/2014/main" id="{2FDE2937-3097-4B70-B988-48576E0F8FEE}"/>
+                <a16:creationId xmlns:a16="http://schemas.microsoft.com/office/drawing/2014/main" id="{DB3F8D38-4F34-462F-B050-38A56C1C7AA5}"/>
               </a:ext>
             </a:extLst>
           </p:cNvPr>
@@ -2922,7 +2922,7 @@
           <p:cNvPr id="11" name="">
             <a:extLst xmlns:a="http://schemas.openxmlformats.org/drawingml/2006/main">
               <a:ext uri="{FF2B5EF4-FFF2-40B4-BE49-F238E27FC236}">
-                <a16:creationId xmlns:a16="http://schemas.microsoft.com/office/drawing/2014/main" id="{481F8656-751F-4C42-84B4-CBBB4DEE8DDD}"/>
+                <a16:creationId xmlns:a16="http://schemas.microsoft.com/office/drawing/2014/main" id="{56643BBF-9D26-4034-A506-0A94445AE5D1}"/>
               </a:ext>
             </a:extLst>
           </p:cNvPr>
@@ -2979,7 +2979,7 @@
           <p:cNvPr id="12" name="">
             <a:extLst xmlns:a="http://schemas.openxmlformats.org/drawingml/2006/main">
               <a:ext uri="{FF2B5EF4-FFF2-40B4-BE49-F238E27FC236}">
-                <a16:creationId xmlns:a16="http://schemas.microsoft.com/office/drawing/2014/main" id="{B1F40182-4DC8-422B-AA0C-482332E98FB7}"/>
+                <a16:creationId xmlns:a16="http://schemas.microsoft.com/office/drawing/2014/main" id="{DBECB4EB-2126-4416-8B94-610F5133DF4E}"/>
               </a:ext>
             </a:extLst>
           </p:cNvPr>
@@ -3036,7 +3036,7 @@
           <p:cNvPr id="13" name="">
             <a:extLst xmlns:a="http://schemas.openxmlformats.org/drawingml/2006/main">
               <a:ext uri="{FF2B5EF4-FFF2-40B4-BE49-F238E27FC236}">
-                <a16:creationId xmlns:a16="http://schemas.microsoft.com/office/drawing/2014/main" id="{48D639D9-1D38-4442-8A6A-853A61FA0D25}"/>
+                <a16:creationId xmlns:a16="http://schemas.microsoft.com/office/drawing/2014/main" id="{A85A52A7-7C26-421F-B8AB-C5649743A111}"/>
               </a:ext>
             </a:extLst>
           </p:cNvPr>
@@ -3091,7 +3091,7 @@
     </p:spTree>
     <p:extLst>
       <p:ext uri="{BB962C8B-B14F-4D97-AF65-F5344CB8AC3E}">
-        <p14:creationId xmlns:p14="http://schemas.microsoft.com/office/powerpoint/2010/main" val="643816135"/>
+        <p14:creationId xmlns:p14="http://schemas.microsoft.com/office/powerpoint/2010/main" val="581861123"/>
       </p:ext>
     </p:extLst>
   </p:cSld>
@@ -3292,7 +3292,7 @@
           <p:cNvPr id="19" name="">
             <a:extLst xmlns:a="http://schemas.openxmlformats.org/drawingml/2006/main">
               <a:ext uri="{FF2B5EF4-FFF2-40B4-BE49-F238E27FC236}">
-                <a16:creationId xmlns:a16="http://schemas.microsoft.com/office/drawing/2014/main" id="{E17869DD-EC50-4B89-81B0-89DA444722A5}"/>
+                <a16:creationId xmlns:a16="http://schemas.microsoft.com/office/drawing/2014/main" id="{2B6984D3-6FA5-4CEF-B839-7AAAA823FBB3}"/>
               </a:ext>
             </a:extLst>
           </p:cNvPr>
@@ -3324,7 +3324,7 @@
           <p:cNvPr id="2" name="">
             <a:extLst xmlns:a="http://schemas.openxmlformats.org/drawingml/2006/main">
               <a:ext uri="{FF2B5EF4-FFF2-40B4-BE49-F238E27FC236}">
-                <a16:creationId xmlns:a16="http://schemas.microsoft.com/office/drawing/2014/main" id="{4BE911D6-9F0F-4CBD-B254-5EC5C860201F}"/>
+                <a16:creationId xmlns:a16="http://schemas.microsoft.com/office/drawing/2014/main" id="{34194EDE-10BD-4CA8-979A-01D88C9F4786}"/>
               </a:ext>
             </a:extLst>
           </p:cNvPr>
@@ -3381,7 +3381,7 @@
           <p:cNvPr id="3" name="">
             <a:extLst xmlns:a="http://schemas.openxmlformats.org/drawingml/2006/main">
               <a:ext uri="{FF2B5EF4-FFF2-40B4-BE49-F238E27FC236}">
-                <a16:creationId xmlns:a16="http://schemas.microsoft.com/office/drawing/2014/main" id="{0AA507A5-8A34-4162-9FBB-CC8068A12572}"/>
+                <a16:creationId xmlns:a16="http://schemas.microsoft.com/office/drawing/2014/main" id="{26FF39F4-A308-43A0-8952-A94EF2E830DA}"/>
               </a:ext>
             </a:extLst>
           </p:cNvPr>
@@ -3413,7 +3413,7 @@
           <p:cNvPr id="4" name="">
             <a:extLst xmlns:a="http://schemas.openxmlformats.org/drawingml/2006/main">
               <a:ext uri="{FF2B5EF4-FFF2-40B4-BE49-F238E27FC236}">
-                <a16:creationId xmlns:a16="http://schemas.microsoft.com/office/drawing/2014/main" id="{F038FD4C-BE68-4355-A585-ADD4350E6B1B}"/>
+                <a16:creationId xmlns:a16="http://schemas.microsoft.com/office/drawing/2014/main" id="{81B182CE-1582-49C0-9671-4938DE5CEB53}"/>
               </a:ext>
             </a:extLst>
           </p:cNvPr>
@@ -3470,7 +3470,7 @@
           <p:cNvPr id="5" name="">
             <a:extLst xmlns:a="http://schemas.openxmlformats.org/drawingml/2006/main">
               <a:ext uri="{FF2B5EF4-FFF2-40B4-BE49-F238E27FC236}">
-                <a16:creationId xmlns:a16="http://schemas.microsoft.com/office/drawing/2014/main" id="{39870E4C-95EC-412A-97F8-D5962FA83EE7}"/>
+                <a16:creationId xmlns:a16="http://schemas.microsoft.com/office/drawing/2014/main" id="{E28B5B57-6B08-4239-8B20-22249FD0BD93}"/>
               </a:ext>
             </a:extLst>
           </p:cNvPr>
@@ -3527,7 +3527,7 @@
           <p:cNvPr id="6" name="">
             <a:extLst xmlns:a="http://schemas.openxmlformats.org/drawingml/2006/main">
               <a:ext uri="{FF2B5EF4-FFF2-40B4-BE49-F238E27FC236}">
-                <a16:creationId xmlns:a16="http://schemas.microsoft.com/office/drawing/2014/main" id="{8159F0CE-723B-4990-B88F-853E57BB3DD7}"/>
+                <a16:creationId xmlns:a16="http://schemas.microsoft.com/office/drawing/2014/main" id="{CC79AC33-6403-4322-A1BB-73DC1422C786}"/>
               </a:ext>
             </a:extLst>
           </p:cNvPr>
@@ -3584,7 +3584,7 @@
           <p:cNvPr id="7" name="">
             <a:extLst xmlns:a="http://schemas.openxmlformats.org/drawingml/2006/main">
               <a:ext uri="{FF2B5EF4-FFF2-40B4-BE49-F238E27FC236}">
-                <a16:creationId xmlns:a16="http://schemas.microsoft.com/office/drawing/2014/main" id="{9A635626-2FC8-4E33-B82B-E2B1C5E6C7A5}"/>
+                <a16:creationId xmlns:a16="http://schemas.microsoft.com/office/drawing/2014/main" id="{B6143F57-FFB8-4C6F-9A1C-F84066E84856}"/>
               </a:ext>
             </a:extLst>
           </p:cNvPr>
@@ -3616,7 +3616,7 @@
           <p:cNvPr id="8" name="">
             <a:extLst xmlns:a="http://schemas.openxmlformats.org/drawingml/2006/main">
               <a:ext uri="{FF2B5EF4-FFF2-40B4-BE49-F238E27FC236}">
-                <a16:creationId xmlns:a16="http://schemas.microsoft.com/office/drawing/2014/main" id="{EB45E8F1-609F-472E-88A4-032B1366C79E}"/>
+                <a16:creationId xmlns:a16="http://schemas.microsoft.com/office/drawing/2014/main" id="{A8A2C0B7-0F2E-4572-8A0A-7195E8D3F900}"/>
               </a:ext>
             </a:extLst>
           </p:cNvPr>
@@ -3673,7 +3673,7 @@
           <p:cNvPr id="9" name="">
             <a:extLst xmlns:a="http://schemas.openxmlformats.org/drawingml/2006/main">
               <a:ext uri="{FF2B5EF4-FFF2-40B4-BE49-F238E27FC236}">
-                <a16:creationId xmlns:a16="http://schemas.microsoft.com/office/drawing/2014/main" id="{480AA5B7-7413-47E5-BD42-1FB197234B28}"/>
+                <a16:creationId xmlns:a16="http://schemas.microsoft.com/office/drawing/2014/main" id="{00A43AE8-C6E0-44A5-BF75-0D4A829824C9}"/>
               </a:ext>
             </a:extLst>
           </p:cNvPr>
@@ -3730,7 +3730,7 @@
           <p:cNvPr id="10" name="">
             <a:extLst xmlns:a="http://schemas.openxmlformats.org/drawingml/2006/main">
               <a:ext uri="{FF2B5EF4-FFF2-40B4-BE49-F238E27FC236}">
-                <a16:creationId xmlns:a16="http://schemas.microsoft.com/office/drawing/2014/main" id="{66F8CA48-A9EB-430A-99CB-B7781768F857}"/>
+                <a16:creationId xmlns:a16="http://schemas.microsoft.com/office/drawing/2014/main" id="{A94FBBA1-DB68-43D6-BD74-B13A8A95DC27}"/>
               </a:ext>
             </a:extLst>
           </p:cNvPr>
@@ -3787,7 +3787,7 @@
           <p:cNvPr id="11" name="">
             <a:extLst xmlns:a="http://schemas.openxmlformats.org/drawingml/2006/main">
               <a:ext uri="{FF2B5EF4-FFF2-40B4-BE49-F238E27FC236}">
-                <a16:creationId xmlns:a16="http://schemas.microsoft.com/office/drawing/2014/main" id="{7757598A-F52F-4B72-B49D-D95FFBE5F802}"/>
+                <a16:creationId xmlns:a16="http://schemas.microsoft.com/office/drawing/2014/main" id="{52118890-047C-4C65-8F95-80E4D41B95C6}"/>
               </a:ext>
             </a:extLst>
           </p:cNvPr>
@@ -3821,7 +3821,7 @@
           <p:cNvPr id="12" name="">
             <a:extLst xmlns:a="http://schemas.openxmlformats.org/drawingml/2006/main">
               <a:ext uri="{FF2B5EF4-FFF2-40B4-BE49-F238E27FC236}">
-                <a16:creationId xmlns:a16="http://schemas.microsoft.com/office/drawing/2014/main" id="{D4C9FFD5-4C13-4A3A-8BBD-0EE12F014117}"/>
+                <a16:creationId xmlns:a16="http://schemas.microsoft.com/office/drawing/2014/main" id="{49FF29D6-359E-4F5F-AB9D-88FA7822F57E}"/>
               </a:ext>
             </a:extLst>
           </p:cNvPr>
@@ -3878,7 +3878,7 @@
           <p:cNvPr id="13" name="">
             <a:extLst xmlns:a="http://schemas.openxmlformats.org/drawingml/2006/main">
               <a:ext uri="{FF2B5EF4-FFF2-40B4-BE49-F238E27FC236}">
-                <a16:creationId xmlns:a16="http://schemas.microsoft.com/office/drawing/2014/main" id="{D046416A-F432-4AC6-BB67-E09BB17F19FA}"/>
+                <a16:creationId xmlns:a16="http://schemas.microsoft.com/office/drawing/2014/main" id="{F2D33303-CE41-4F7B-B9A8-C338F5A3E91C}"/>
               </a:ext>
             </a:extLst>
           </p:cNvPr>
@@ -3935,7 +3935,7 @@
           <p:cNvPr id="14" name="">
             <a:extLst xmlns:a="http://schemas.openxmlformats.org/drawingml/2006/main">
               <a:ext uri="{FF2B5EF4-FFF2-40B4-BE49-F238E27FC236}">
-                <a16:creationId xmlns:a16="http://schemas.microsoft.com/office/drawing/2014/main" id="{2823CF00-29AC-44D8-AF8A-AF86440E6DAD}"/>
+                <a16:creationId xmlns:a16="http://schemas.microsoft.com/office/drawing/2014/main" id="{6C81FDC2-E91E-4DC7-BF1E-B10CB7FB5752}"/>
               </a:ext>
             </a:extLst>
           </p:cNvPr>
@@ -3992,7 +3992,7 @@
           <p:cNvPr id="15" name="">
             <a:extLst xmlns:a="http://schemas.openxmlformats.org/drawingml/2006/main">
               <a:ext uri="{FF2B5EF4-FFF2-40B4-BE49-F238E27FC236}">
-                <a16:creationId xmlns:a16="http://schemas.microsoft.com/office/drawing/2014/main" id="{F86B8B93-7228-4BE9-84DC-4B78816BEE63}"/>
+                <a16:creationId xmlns:a16="http://schemas.microsoft.com/office/drawing/2014/main" id="{B94D2D0D-C202-4856-B62F-D3E9DEF91009}"/>
               </a:ext>
             </a:extLst>
           </p:cNvPr>
@@ -4026,7 +4026,7 @@
           <p:cNvPr id="16" name="">
             <a:extLst xmlns:a="http://schemas.openxmlformats.org/drawingml/2006/main">
               <a:ext uri="{FF2B5EF4-FFF2-40B4-BE49-F238E27FC236}">
-                <a16:creationId xmlns:a16="http://schemas.microsoft.com/office/drawing/2014/main" id="{86EF7D36-CF3D-4958-BE07-BFA6CE32E326}"/>
+                <a16:creationId xmlns:a16="http://schemas.microsoft.com/office/drawing/2014/main" id="{7F83616D-B464-4BA4-BB93-6DA2BD4F35E0}"/>
               </a:ext>
             </a:extLst>
           </p:cNvPr>
@@ -4083,7 +4083,7 @@
           <p:cNvPr id="17" name="">
             <a:extLst xmlns:a="http://schemas.openxmlformats.org/drawingml/2006/main">
               <a:ext uri="{FF2B5EF4-FFF2-40B4-BE49-F238E27FC236}">
-                <a16:creationId xmlns:a16="http://schemas.microsoft.com/office/drawing/2014/main" id="{C7DEAE76-A20D-45D4-8426-00F459F99F7E}"/>
+                <a16:creationId xmlns:a16="http://schemas.microsoft.com/office/drawing/2014/main" id="{5E6730A7-5329-4937-ADF6-45B8726D64E0}"/>
               </a:ext>
             </a:extLst>
           </p:cNvPr>
@@ -4140,7 +4140,7 @@
           <p:cNvPr id="18" name="">
             <a:extLst xmlns:a="http://schemas.openxmlformats.org/drawingml/2006/main">
               <a:ext uri="{FF2B5EF4-FFF2-40B4-BE49-F238E27FC236}">
-                <a16:creationId xmlns:a16="http://schemas.microsoft.com/office/drawing/2014/main" id="{534B50AB-D3C4-4473-B47F-9C454DC15A96}"/>
+                <a16:creationId xmlns:a16="http://schemas.microsoft.com/office/drawing/2014/main" id="{C47BB451-FE11-44C7-9874-9879D03949D1}"/>
               </a:ext>
             </a:extLst>
           </p:cNvPr>
@@ -4195,7 +4195,7 @@
     </p:spTree>
     <p:extLst>
       <p:ext uri="{BB962C8B-B14F-4D97-AF65-F5344CB8AC3E}">
-        <p14:creationId xmlns:p14="http://schemas.microsoft.com/office/powerpoint/2010/main" val="1631163959"/>
+        <p14:creationId xmlns:p14="http://schemas.microsoft.com/office/powerpoint/2010/main" val="775666857"/>
       </p:ext>
     </p:extLst>
   </p:cSld>
@@ -4350,7 +4350,7 @@
           <p:cNvPr id="23" name="">
             <a:extLst xmlns:a="http://schemas.openxmlformats.org/drawingml/2006/main">
               <a:ext uri="{FF2B5EF4-FFF2-40B4-BE49-F238E27FC236}">
-                <a16:creationId xmlns:a16="http://schemas.microsoft.com/office/drawing/2014/main" id="{57E0B0F5-7382-4210-A62B-18620635A32B}"/>
+                <a16:creationId xmlns:a16="http://schemas.microsoft.com/office/drawing/2014/main" id="{A5CD2546-41FD-4B4D-9D54-E3740D14D236}"/>
               </a:ext>
             </a:extLst>
           </p:cNvPr>
@@ -4382,7 +4382,7 @@
           <p:cNvPr id="2" name="">
             <a:extLst xmlns:a="http://schemas.openxmlformats.org/drawingml/2006/main">
               <a:ext uri="{FF2B5EF4-FFF2-40B4-BE49-F238E27FC236}">
-                <a16:creationId xmlns:a16="http://schemas.microsoft.com/office/drawing/2014/main" id="{461D0015-938E-4F6E-893C-3BD98959AA95}"/>
+                <a16:creationId xmlns:a16="http://schemas.microsoft.com/office/drawing/2014/main" id="{C75F1606-201B-4182-A952-3E66F4EBA86D}"/>
               </a:ext>
             </a:extLst>
           </p:cNvPr>
@@ -4439,7 +4439,7 @@
           <p:cNvPr id="3" name="">
             <a:extLst xmlns:a="http://schemas.openxmlformats.org/drawingml/2006/main">
               <a:ext uri="{FF2B5EF4-FFF2-40B4-BE49-F238E27FC236}">
-                <a16:creationId xmlns:a16="http://schemas.microsoft.com/office/drawing/2014/main" id="{C35B7F37-7A0A-4191-82D7-9691EE041631}"/>
+                <a16:creationId xmlns:a16="http://schemas.microsoft.com/office/drawing/2014/main" id="{C6A76AA1-5B1D-4058-9929-9B0BEB01CD54}"/>
               </a:ext>
             </a:extLst>
           </p:cNvPr>
@@ -4471,7 +4471,7 @@
           <p:cNvPr id="4" name="">
             <a:extLst xmlns:a="http://schemas.openxmlformats.org/drawingml/2006/main">
               <a:ext uri="{FF2B5EF4-FFF2-40B4-BE49-F238E27FC236}">
-                <a16:creationId xmlns:a16="http://schemas.microsoft.com/office/drawing/2014/main" id="{1BD495F4-67F9-4FC3-A06F-BE3188D80AC1}"/>
+                <a16:creationId xmlns:a16="http://schemas.microsoft.com/office/drawing/2014/main" id="{1FB47296-FE51-4860-BDFD-BC162E634FC6}"/>
               </a:ext>
             </a:extLst>
           </p:cNvPr>
@@ -4528,7 +4528,7 @@
           <p:cNvPr id="5" name="">
             <a:extLst xmlns:a="http://schemas.openxmlformats.org/drawingml/2006/main">
               <a:ext uri="{FF2B5EF4-FFF2-40B4-BE49-F238E27FC236}">
-                <a16:creationId xmlns:a16="http://schemas.microsoft.com/office/drawing/2014/main" id="{EE8BE12D-FC6D-42E5-B840-4D8F5F7DECC7}"/>
+                <a16:creationId xmlns:a16="http://schemas.microsoft.com/office/drawing/2014/main" id="{C6C9E4CA-98FB-496E-9C7C-64FCB0870CE7}"/>
               </a:ext>
             </a:extLst>
           </p:cNvPr>
@@ -4585,7 +4585,7 @@
           <p:cNvPr id="6" name="">
             <a:extLst xmlns:a="http://schemas.openxmlformats.org/drawingml/2006/main">
               <a:ext uri="{FF2B5EF4-FFF2-40B4-BE49-F238E27FC236}">
-                <a16:creationId xmlns:a16="http://schemas.microsoft.com/office/drawing/2014/main" id="{7BC64D0A-D486-45D1-B640-776EF930EBB5}"/>
+                <a16:creationId xmlns:a16="http://schemas.microsoft.com/office/drawing/2014/main" id="{0D0B7566-C389-4F4E-9549-372EEA069D25}"/>
               </a:ext>
             </a:extLst>
           </p:cNvPr>
@@ -4642,7 +4642,7 @@
           <p:cNvPr id="7" name="">
             <a:extLst xmlns:a="http://schemas.openxmlformats.org/drawingml/2006/main">
               <a:ext uri="{FF2B5EF4-FFF2-40B4-BE49-F238E27FC236}">
-                <a16:creationId xmlns:a16="http://schemas.microsoft.com/office/drawing/2014/main" id="{9C1D8642-DB84-408D-96FA-6439FDCFC69A}"/>
+                <a16:creationId xmlns:a16="http://schemas.microsoft.com/office/drawing/2014/main" id="{D4A015EC-015D-4460-856A-BDA87AC6D177}"/>
               </a:ext>
             </a:extLst>
           </p:cNvPr>
@@ -4674,7 +4674,7 @@
           <p:cNvPr id="8" name="">
             <a:extLst xmlns:a="http://schemas.openxmlformats.org/drawingml/2006/main">
               <a:ext uri="{FF2B5EF4-FFF2-40B4-BE49-F238E27FC236}">
-                <a16:creationId xmlns:a16="http://schemas.microsoft.com/office/drawing/2014/main" id="{2E3C360E-40DE-451C-9B74-FC1674CA565D}"/>
+                <a16:creationId xmlns:a16="http://schemas.microsoft.com/office/drawing/2014/main" id="{C55EE76A-2DEE-4638-97F0-82774B3F75F5}"/>
               </a:ext>
             </a:extLst>
           </p:cNvPr>
@@ -4731,7 +4731,7 @@
           <p:cNvPr id="9" name="">
             <a:extLst xmlns:a="http://schemas.openxmlformats.org/drawingml/2006/main">
               <a:ext uri="{FF2B5EF4-FFF2-40B4-BE49-F238E27FC236}">
-                <a16:creationId xmlns:a16="http://schemas.microsoft.com/office/drawing/2014/main" id="{60A4B3AB-738B-4B13-9874-A39D283C857F}"/>
+                <a16:creationId xmlns:a16="http://schemas.microsoft.com/office/drawing/2014/main" id="{FF6F24E0-C380-4D66-B90E-41C782F977A8}"/>
               </a:ext>
             </a:extLst>
           </p:cNvPr>
@@ -4788,7 +4788,7 @@
           <p:cNvPr id="10" name="">
             <a:extLst xmlns:a="http://schemas.openxmlformats.org/drawingml/2006/main">
               <a:ext uri="{FF2B5EF4-FFF2-40B4-BE49-F238E27FC236}">
-                <a16:creationId xmlns:a16="http://schemas.microsoft.com/office/drawing/2014/main" id="{4BD2E367-DD04-4AB1-8619-7F3B65713F76}"/>
+                <a16:creationId xmlns:a16="http://schemas.microsoft.com/office/drawing/2014/main" id="{D7389F48-0AA5-4FB4-8EAE-51FD061412C9}"/>
               </a:ext>
             </a:extLst>
           </p:cNvPr>
@@ -4822,7 +4822,7 @@
           <p:cNvPr id="11" name="">
             <a:extLst xmlns:a="http://schemas.openxmlformats.org/drawingml/2006/main">
               <a:ext uri="{FF2B5EF4-FFF2-40B4-BE49-F238E27FC236}">
-                <a16:creationId xmlns:a16="http://schemas.microsoft.com/office/drawing/2014/main" id="{6A0E8615-A72C-4F65-BF87-ABFBC3DDC3D8}"/>
+                <a16:creationId xmlns:a16="http://schemas.microsoft.com/office/drawing/2014/main" id="{45EDFBD6-0A98-4A19-B9B4-ED46B65B371D}"/>
               </a:ext>
             </a:extLst>
           </p:cNvPr>
@@ -4854,7 +4854,7 @@
           <p:cNvPr id="12" name="">
             <a:extLst xmlns:a="http://schemas.openxmlformats.org/drawingml/2006/main">
               <a:ext uri="{FF2B5EF4-FFF2-40B4-BE49-F238E27FC236}">
-                <a16:creationId xmlns:a16="http://schemas.microsoft.com/office/drawing/2014/main" id="{AE5DEE89-F0DB-4C35-AF26-8515321A075F}"/>
+                <a16:creationId xmlns:a16="http://schemas.microsoft.com/office/drawing/2014/main" id="{7C46586D-24EB-44B8-8D89-AC11996716BF}"/>
               </a:ext>
             </a:extLst>
           </p:cNvPr>
@@ -4911,7 +4911,7 @@
           <p:cNvPr id="13" name="">
             <a:extLst xmlns:a="http://schemas.openxmlformats.org/drawingml/2006/main">
               <a:ext uri="{FF2B5EF4-FFF2-40B4-BE49-F238E27FC236}">
-                <a16:creationId xmlns:a16="http://schemas.microsoft.com/office/drawing/2014/main" id="{EC861B67-FFBA-424B-B5AA-3A22C79F59DC}"/>
+                <a16:creationId xmlns:a16="http://schemas.microsoft.com/office/drawing/2014/main" id="{C32B3687-A75A-4F59-BCB3-766090B0E096}"/>
               </a:ext>
             </a:extLst>
           </p:cNvPr>
@@ -4968,7 +4968,7 @@
           <p:cNvPr id="14" name="">
             <a:extLst xmlns:a="http://schemas.openxmlformats.org/drawingml/2006/main">
               <a:ext uri="{FF2B5EF4-FFF2-40B4-BE49-F238E27FC236}">
-                <a16:creationId xmlns:a16="http://schemas.microsoft.com/office/drawing/2014/main" id="{36983941-F672-4026-B384-EC7C6CBBA524}"/>
+                <a16:creationId xmlns:a16="http://schemas.microsoft.com/office/drawing/2014/main" id="{077DE33A-34E2-4283-BC2C-D24F5169E780}"/>
               </a:ext>
             </a:extLst>
           </p:cNvPr>
@@ -5002,7 +5002,7 @@
           <p:cNvPr id="15" name="">
             <a:extLst xmlns:a="http://schemas.openxmlformats.org/drawingml/2006/main">
               <a:ext uri="{FF2B5EF4-FFF2-40B4-BE49-F238E27FC236}">
-                <a16:creationId xmlns:a16="http://schemas.microsoft.com/office/drawing/2014/main" id="{BFF69F8E-4353-40EF-A71F-4093CDF7E820}"/>
+                <a16:creationId xmlns:a16="http://schemas.microsoft.com/office/drawing/2014/main" id="{15A4AAD8-2B7A-4F4F-A814-77920B4260AE}"/>
               </a:ext>
             </a:extLst>
           </p:cNvPr>
@@ -5034,7 +5034,7 @@
           <p:cNvPr id="16" name="">
             <a:extLst xmlns:a="http://schemas.openxmlformats.org/drawingml/2006/main">
               <a:ext uri="{FF2B5EF4-FFF2-40B4-BE49-F238E27FC236}">
-                <a16:creationId xmlns:a16="http://schemas.microsoft.com/office/drawing/2014/main" id="{F3138205-C7D9-4EE7-A444-EB876CFFFA83}"/>
+                <a16:creationId xmlns:a16="http://schemas.microsoft.com/office/drawing/2014/main" id="{0B3E5C17-757F-4D7E-84DA-58D54DC61EE2}"/>
               </a:ext>
             </a:extLst>
           </p:cNvPr>
@@ -5091,7 +5091,7 @@
           <p:cNvPr id="17" name="">
             <a:extLst xmlns:a="http://schemas.openxmlformats.org/drawingml/2006/main">
               <a:ext uri="{FF2B5EF4-FFF2-40B4-BE49-F238E27FC236}">
-                <a16:creationId xmlns:a16="http://schemas.microsoft.com/office/drawing/2014/main" id="{DD24F637-03C8-4A2F-8BB0-DDCA80D13CDB}"/>
+                <a16:creationId xmlns:a16="http://schemas.microsoft.com/office/drawing/2014/main" id="{401823C1-300D-40F9-B4CB-379F0834F805}"/>
               </a:ext>
             </a:extLst>
           </p:cNvPr>
@@ -5148,7 +5148,7 @@
           <p:cNvPr id="18" name="">
             <a:extLst xmlns:a="http://schemas.openxmlformats.org/drawingml/2006/main">
               <a:ext uri="{FF2B5EF4-FFF2-40B4-BE49-F238E27FC236}">
-                <a16:creationId xmlns:a16="http://schemas.microsoft.com/office/drawing/2014/main" id="{E9F04BEA-A675-47E3-A164-6211244C744C}"/>
+                <a16:creationId xmlns:a16="http://schemas.microsoft.com/office/drawing/2014/main" id="{0DA2B970-F656-404E-8500-27C16101BA45}"/>
               </a:ext>
             </a:extLst>
           </p:cNvPr>
@@ -5182,7 +5182,7 @@
           <p:cNvPr id="19" name="">
             <a:extLst xmlns:a="http://schemas.openxmlformats.org/drawingml/2006/main">
               <a:ext uri="{FF2B5EF4-FFF2-40B4-BE49-F238E27FC236}">
-                <a16:creationId xmlns:a16="http://schemas.microsoft.com/office/drawing/2014/main" id="{8BFAACB9-88EC-41E1-B960-C6BCBAF96F66}"/>
+                <a16:creationId xmlns:a16="http://schemas.microsoft.com/office/drawing/2014/main" id="{7C310A82-600B-42EC-98B6-20575A288B32}"/>
               </a:ext>
             </a:extLst>
           </p:cNvPr>
@@ -5214,7 +5214,7 @@
           <p:cNvPr id="20" name="">
             <a:extLst xmlns:a="http://schemas.openxmlformats.org/drawingml/2006/main">
               <a:ext uri="{FF2B5EF4-FFF2-40B4-BE49-F238E27FC236}">
-                <a16:creationId xmlns:a16="http://schemas.microsoft.com/office/drawing/2014/main" id="{51E2B8C1-BACE-48B0-85E9-0DF4EC55027E}"/>
+                <a16:creationId xmlns:a16="http://schemas.microsoft.com/office/drawing/2014/main" id="{97F817DE-C403-4C8B-8E92-6A3CE455EE0A}"/>
               </a:ext>
             </a:extLst>
           </p:cNvPr>
@@ -5271,7 +5271,7 @@
           <p:cNvPr id="21" name="">
             <a:extLst xmlns:a="http://schemas.openxmlformats.org/drawingml/2006/main">
               <a:ext uri="{FF2B5EF4-FFF2-40B4-BE49-F238E27FC236}">
-                <a16:creationId xmlns:a16="http://schemas.microsoft.com/office/drawing/2014/main" id="{E5656029-7373-466B-BC6B-77D54D18FBDC}"/>
+                <a16:creationId xmlns:a16="http://schemas.microsoft.com/office/drawing/2014/main" id="{73C55E96-CB7C-4D13-AFB0-0239755A2568}"/>
               </a:ext>
             </a:extLst>
           </p:cNvPr>
@@ -5328,7 +5328,7 @@
           <p:cNvPr id="22" name="">
             <a:extLst xmlns:a="http://schemas.openxmlformats.org/drawingml/2006/main">
               <a:ext uri="{FF2B5EF4-FFF2-40B4-BE49-F238E27FC236}">
-                <a16:creationId xmlns:a16="http://schemas.microsoft.com/office/drawing/2014/main" id="{DCAA1C13-21F2-4586-8CBB-F044241C880C}"/>
+                <a16:creationId xmlns:a16="http://schemas.microsoft.com/office/drawing/2014/main" id="{A87905EC-E788-4213-8C18-C8202C7B58AA}"/>
               </a:ext>
             </a:extLst>
           </p:cNvPr>
@@ -5383,7 +5383,7 @@
     </p:spTree>
     <p:extLst>
       <p:ext uri="{BB962C8B-B14F-4D97-AF65-F5344CB8AC3E}">
-        <p14:creationId xmlns:p14="http://schemas.microsoft.com/office/powerpoint/2010/main" val="1787530331"/>
+        <p14:creationId xmlns:p14="http://schemas.microsoft.com/office/powerpoint/2010/main" val="1149179025"/>
       </p:ext>
     </p:extLst>
   </p:cSld>
@@ -5584,7 +5584,7 @@
           <p:cNvPr id="23" name="">
             <a:extLst xmlns:a="http://schemas.openxmlformats.org/drawingml/2006/main">
               <a:ext uri="{FF2B5EF4-FFF2-40B4-BE49-F238E27FC236}">
-                <a16:creationId xmlns:a16="http://schemas.microsoft.com/office/drawing/2014/main" id="{1195EFEB-79B3-4FBA-BD9B-B2C4D95840EB}"/>
+                <a16:creationId xmlns:a16="http://schemas.microsoft.com/office/drawing/2014/main" id="{83D55869-2418-4F8C-8307-222CDCAEC2BC}"/>
               </a:ext>
             </a:extLst>
           </p:cNvPr>
@@ -5616,7 +5616,7 @@
           <p:cNvPr id="2" name="">
             <a:extLst xmlns:a="http://schemas.openxmlformats.org/drawingml/2006/main">
               <a:ext uri="{FF2B5EF4-FFF2-40B4-BE49-F238E27FC236}">
-                <a16:creationId xmlns:a16="http://schemas.microsoft.com/office/drawing/2014/main" id="{17DCAA89-065B-47AF-B212-46D170E35344}"/>
+                <a16:creationId xmlns:a16="http://schemas.microsoft.com/office/drawing/2014/main" id="{E68A3D96-C71D-4C1B-99BE-8AB30A8BA5B3}"/>
               </a:ext>
             </a:extLst>
           </p:cNvPr>
@@ -5673,7 +5673,7 @@
           <p:cNvPr id="3" name="">
             <a:extLst xmlns:a="http://schemas.openxmlformats.org/drawingml/2006/main">
               <a:ext uri="{FF2B5EF4-FFF2-40B4-BE49-F238E27FC236}">
-                <a16:creationId xmlns:a16="http://schemas.microsoft.com/office/drawing/2014/main" id="{F60E60D6-1D20-4AE7-A722-15045EA2CE84}"/>
+                <a16:creationId xmlns:a16="http://schemas.microsoft.com/office/drawing/2014/main" id="{193E60BC-549E-407A-A15A-F1C5630B694E}"/>
               </a:ext>
             </a:extLst>
           </p:cNvPr>
@@ -5705,7 +5705,7 @@
           <p:cNvPr id="4" name="">
             <a:extLst xmlns:a="http://schemas.openxmlformats.org/drawingml/2006/main">
               <a:ext uri="{FF2B5EF4-FFF2-40B4-BE49-F238E27FC236}">
-                <a16:creationId xmlns:a16="http://schemas.microsoft.com/office/drawing/2014/main" id="{20B5AC9C-DFA6-4B9C-92D8-82B46D077E01}"/>
+                <a16:creationId xmlns:a16="http://schemas.microsoft.com/office/drawing/2014/main" id="{D40E6265-8543-4B1B-A7DD-79E4CF3C73DF}"/>
               </a:ext>
             </a:extLst>
           </p:cNvPr>
@@ -5762,7 +5762,7 @@
           <p:cNvPr id="5" name="">
             <a:extLst xmlns:a="http://schemas.openxmlformats.org/drawingml/2006/main">
               <a:ext uri="{FF2B5EF4-FFF2-40B4-BE49-F238E27FC236}">
-                <a16:creationId xmlns:a16="http://schemas.microsoft.com/office/drawing/2014/main" id="{7244D69A-E3D7-4EE1-A949-4A73853DC646}"/>
+                <a16:creationId xmlns:a16="http://schemas.microsoft.com/office/drawing/2014/main" id="{F73C5875-AC58-485B-8C8B-A8BC780CD57D}"/>
               </a:ext>
             </a:extLst>
           </p:cNvPr>
@@ -5819,7 +5819,7 @@
           <p:cNvPr id="6" name="">
             <a:extLst xmlns:a="http://schemas.openxmlformats.org/drawingml/2006/main">
               <a:ext uri="{FF2B5EF4-FFF2-40B4-BE49-F238E27FC236}">
-                <a16:creationId xmlns:a16="http://schemas.microsoft.com/office/drawing/2014/main" id="{7DF5C6B8-D5B7-42EA-AB6D-75BC1225C2BF}"/>
+                <a16:creationId xmlns:a16="http://schemas.microsoft.com/office/drawing/2014/main" id="{EF23845C-A9BC-4D17-93EF-ED3A3EA17449}"/>
               </a:ext>
             </a:extLst>
           </p:cNvPr>
@@ -5876,7 +5876,7 @@
           <p:cNvPr id="7" name="">
             <a:extLst xmlns:a="http://schemas.openxmlformats.org/drawingml/2006/main">
               <a:ext uri="{FF2B5EF4-FFF2-40B4-BE49-F238E27FC236}">
-                <a16:creationId xmlns:a16="http://schemas.microsoft.com/office/drawing/2014/main" id="{965895D1-FA56-4947-889E-B47BCAE8BFC0}"/>
+                <a16:creationId xmlns:a16="http://schemas.microsoft.com/office/drawing/2014/main" id="{F6CC0B5A-1C1E-41D2-8A30-AEDB4861038B}"/>
               </a:ext>
             </a:extLst>
           </p:cNvPr>
@@ -5908,7 +5908,7 @@
           <p:cNvPr id="8" name="">
             <a:extLst xmlns:a="http://schemas.openxmlformats.org/drawingml/2006/main">
               <a:ext uri="{FF2B5EF4-FFF2-40B4-BE49-F238E27FC236}">
-                <a16:creationId xmlns:a16="http://schemas.microsoft.com/office/drawing/2014/main" id="{BCD3AEDF-2FC3-423E-B4F0-2A7099B57D17}"/>
+                <a16:creationId xmlns:a16="http://schemas.microsoft.com/office/drawing/2014/main" id="{737A5E55-71C0-4612-814A-8F6F4EB34D74}"/>
               </a:ext>
             </a:extLst>
           </p:cNvPr>
@@ -5965,7 +5965,7 @@
           <p:cNvPr id="9" name="">
             <a:extLst xmlns:a="http://schemas.openxmlformats.org/drawingml/2006/main">
               <a:ext uri="{FF2B5EF4-FFF2-40B4-BE49-F238E27FC236}">
-                <a16:creationId xmlns:a16="http://schemas.microsoft.com/office/drawing/2014/main" id="{1A3A5B48-B2D5-4A15-872C-02DFC63BB655}"/>
+                <a16:creationId xmlns:a16="http://schemas.microsoft.com/office/drawing/2014/main" id="{9517DD83-5F7C-4AFE-ABBA-99C2DBD77FD9}"/>
               </a:ext>
             </a:extLst>
           </p:cNvPr>
@@ -6022,7 +6022,7 @@
           <p:cNvPr id="10" name="">
             <a:extLst xmlns:a="http://schemas.openxmlformats.org/drawingml/2006/main">
               <a:ext uri="{FF2B5EF4-FFF2-40B4-BE49-F238E27FC236}">
-                <a16:creationId xmlns:a16="http://schemas.microsoft.com/office/drawing/2014/main" id="{B7BB6E07-32D5-4F81-8934-0EEC0765655A}"/>
+                <a16:creationId xmlns:a16="http://schemas.microsoft.com/office/drawing/2014/main" id="{15379337-D5E1-4C47-85E7-769B25B8E0CD}"/>
               </a:ext>
             </a:extLst>
           </p:cNvPr>
@@ -6056,7 +6056,7 @@
           <p:cNvPr id="11" name="">
             <a:extLst xmlns:a="http://schemas.openxmlformats.org/drawingml/2006/main">
               <a:ext uri="{FF2B5EF4-FFF2-40B4-BE49-F238E27FC236}">
-                <a16:creationId xmlns:a16="http://schemas.microsoft.com/office/drawing/2014/main" id="{E7740A66-10FF-4EE3-B4C1-8305E2258E14}"/>
+                <a16:creationId xmlns:a16="http://schemas.microsoft.com/office/drawing/2014/main" id="{B3087465-6028-42C4-98CD-0215FA915E43}"/>
               </a:ext>
             </a:extLst>
           </p:cNvPr>
@@ -6088,7 +6088,7 @@
           <p:cNvPr id="12" name="">
             <a:extLst xmlns:a="http://schemas.openxmlformats.org/drawingml/2006/main">
               <a:ext uri="{FF2B5EF4-FFF2-40B4-BE49-F238E27FC236}">
-                <a16:creationId xmlns:a16="http://schemas.microsoft.com/office/drawing/2014/main" id="{A687417D-618F-4D84-A9BC-696FD27CF8FA}"/>
+                <a16:creationId xmlns:a16="http://schemas.microsoft.com/office/drawing/2014/main" id="{CDD538F6-3F44-4F6E-AE40-94B27955AC81}"/>
               </a:ext>
             </a:extLst>
           </p:cNvPr>
@@ -6145,7 +6145,7 @@
           <p:cNvPr id="13" name="">
             <a:extLst xmlns:a="http://schemas.openxmlformats.org/drawingml/2006/main">
               <a:ext uri="{FF2B5EF4-FFF2-40B4-BE49-F238E27FC236}">
-                <a16:creationId xmlns:a16="http://schemas.microsoft.com/office/drawing/2014/main" id="{B7FBA721-AAC0-4F8B-B2DB-DB38BD13CC23}"/>
+                <a16:creationId xmlns:a16="http://schemas.microsoft.com/office/drawing/2014/main" id="{8E41E33D-112E-4EB9-8895-A4C265247C86}"/>
               </a:ext>
             </a:extLst>
           </p:cNvPr>
@@ -6202,7 +6202,7 @@
           <p:cNvPr id="14" name="">
             <a:extLst xmlns:a="http://schemas.openxmlformats.org/drawingml/2006/main">
               <a:ext uri="{FF2B5EF4-FFF2-40B4-BE49-F238E27FC236}">
-                <a16:creationId xmlns:a16="http://schemas.microsoft.com/office/drawing/2014/main" id="{0728CE31-BD98-40C8-B39F-63AE66580CAB}"/>
+                <a16:creationId xmlns:a16="http://schemas.microsoft.com/office/drawing/2014/main" id="{5A5208DA-ACCD-4E54-8740-127244E17FEC}"/>
               </a:ext>
             </a:extLst>
           </p:cNvPr>
@@ -6236,7 +6236,7 @@
           <p:cNvPr id="15" name="">
             <a:extLst xmlns:a="http://schemas.openxmlformats.org/drawingml/2006/main">
               <a:ext uri="{FF2B5EF4-FFF2-40B4-BE49-F238E27FC236}">
-                <a16:creationId xmlns:a16="http://schemas.microsoft.com/office/drawing/2014/main" id="{C8EB3F6E-86E9-48FE-BC63-0B565C7F6742}"/>
+                <a16:creationId xmlns:a16="http://schemas.microsoft.com/office/drawing/2014/main" id="{8FF43CB7-0723-4DB3-8215-CA8A8E7A0168}"/>
               </a:ext>
             </a:extLst>
           </p:cNvPr>
@@ -6268,7 +6268,7 @@
           <p:cNvPr id="16" name="">
             <a:extLst xmlns:a="http://schemas.openxmlformats.org/drawingml/2006/main">
               <a:ext uri="{FF2B5EF4-FFF2-40B4-BE49-F238E27FC236}">
-                <a16:creationId xmlns:a16="http://schemas.microsoft.com/office/drawing/2014/main" id="{CAECF088-34C4-4ECC-8B9C-102273789D58}"/>
+                <a16:creationId xmlns:a16="http://schemas.microsoft.com/office/drawing/2014/main" id="{BA9FD9F4-3E18-467B-BFD7-BDE06BFC87BF}"/>
               </a:ext>
             </a:extLst>
           </p:cNvPr>
@@ -6325,7 +6325,7 @@
           <p:cNvPr id="17" name="">
             <a:extLst xmlns:a="http://schemas.openxmlformats.org/drawingml/2006/main">
               <a:ext uri="{FF2B5EF4-FFF2-40B4-BE49-F238E27FC236}">
-                <a16:creationId xmlns:a16="http://schemas.microsoft.com/office/drawing/2014/main" id="{89B711BA-437B-4F7C-B548-B96AAE2DF74E}"/>
+                <a16:creationId xmlns:a16="http://schemas.microsoft.com/office/drawing/2014/main" id="{57541F92-8BC5-491A-97C7-536C03FCA2C0}"/>
               </a:ext>
             </a:extLst>
           </p:cNvPr>
@@ -6382,7 +6382,7 @@
           <p:cNvPr id="18" name="">
             <a:extLst xmlns:a="http://schemas.openxmlformats.org/drawingml/2006/main">
               <a:ext uri="{FF2B5EF4-FFF2-40B4-BE49-F238E27FC236}">
-                <a16:creationId xmlns:a16="http://schemas.microsoft.com/office/drawing/2014/main" id="{B9F10BB8-FCEF-4082-AFAA-A0AA3B51D934}"/>
+                <a16:creationId xmlns:a16="http://schemas.microsoft.com/office/drawing/2014/main" id="{FDAD49A4-2407-40C0-8E62-88D1AA332510}"/>
               </a:ext>
             </a:extLst>
           </p:cNvPr>
@@ -6416,7 +6416,7 @@
           <p:cNvPr id="19" name="">
             <a:extLst xmlns:a="http://schemas.openxmlformats.org/drawingml/2006/main">
               <a:ext uri="{FF2B5EF4-FFF2-40B4-BE49-F238E27FC236}">
-                <a16:creationId xmlns:a16="http://schemas.microsoft.com/office/drawing/2014/main" id="{CE8D60CF-5507-44CF-B789-25660686C365}"/>
+                <a16:creationId xmlns:a16="http://schemas.microsoft.com/office/drawing/2014/main" id="{53718EB8-DC60-4EFC-B30E-62652AA542AF}"/>
               </a:ext>
             </a:extLst>
           </p:cNvPr>
@@ -6448,7 +6448,7 @@
           <p:cNvPr id="20" name="">
             <a:extLst xmlns:a="http://schemas.openxmlformats.org/drawingml/2006/main">
               <a:ext uri="{FF2B5EF4-FFF2-40B4-BE49-F238E27FC236}">
-                <a16:creationId xmlns:a16="http://schemas.microsoft.com/office/drawing/2014/main" id="{A836E540-E671-4D4B-829E-5497FBDD2E01}"/>
+                <a16:creationId xmlns:a16="http://schemas.microsoft.com/office/drawing/2014/main" id="{93EBC2E5-5AA0-4445-9145-561815D03040}"/>
               </a:ext>
             </a:extLst>
           </p:cNvPr>
@@ -6505,7 +6505,7 @@
           <p:cNvPr id="21" name="">
             <a:extLst xmlns:a="http://schemas.openxmlformats.org/drawingml/2006/main">
               <a:ext uri="{FF2B5EF4-FFF2-40B4-BE49-F238E27FC236}">
-                <a16:creationId xmlns:a16="http://schemas.microsoft.com/office/drawing/2014/main" id="{2D7A01DA-1698-4C7D-8043-F287EC12F32E}"/>
+                <a16:creationId xmlns:a16="http://schemas.microsoft.com/office/drawing/2014/main" id="{56D0B988-68DA-4852-A4F4-3F4AC2F55C78}"/>
               </a:ext>
             </a:extLst>
           </p:cNvPr>
@@ -6562,7 +6562,7 @@
           <p:cNvPr id="22" name="">
             <a:extLst xmlns:a="http://schemas.openxmlformats.org/drawingml/2006/main">
               <a:ext uri="{FF2B5EF4-FFF2-40B4-BE49-F238E27FC236}">
-                <a16:creationId xmlns:a16="http://schemas.microsoft.com/office/drawing/2014/main" id="{2CB4F7F5-28D8-48CC-87B9-71EE2FF71ECA}"/>
+                <a16:creationId xmlns:a16="http://schemas.microsoft.com/office/drawing/2014/main" id="{CE73B1A5-E387-4E3A-876A-7342CED541CB}"/>
               </a:ext>
             </a:extLst>
           </p:cNvPr>
@@ -6617,7 +6617,7 @@
     </p:spTree>
     <p:extLst>
       <p:ext uri="{BB962C8B-B14F-4D97-AF65-F5344CB8AC3E}">
-        <p14:creationId xmlns:p14="http://schemas.microsoft.com/office/powerpoint/2010/main" val="1315081497"/>
+        <p14:creationId xmlns:p14="http://schemas.microsoft.com/office/powerpoint/2010/main" val="851010274"/>
       </p:ext>
     </p:extLst>
   </p:cSld>
@@ -6818,7 +6818,7 @@
           <p:cNvPr id="16" name="">
             <a:extLst xmlns:a="http://schemas.openxmlformats.org/drawingml/2006/main">
               <a:ext uri="{FF2B5EF4-FFF2-40B4-BE49-F238E27FC236}">
-                <a16:creationId xmlns:a16="http://schemas.microsoft.com/office/drawing/2014/main" id="{C352388B-EBC4-4751-87DC-CE10020AB026}"/>
+                <a16:creationId xmlns:a16="http://schemas.microsoft.com/office/drawing/2014/main" id="{11BB458C-09DF-459D-A567-1EFBB66E88E3}"/>
               </a:ext>
             </a:extLst>
           </p:cNvPr>
@@ -6850,7 +6850,7 @@
           <p:cNvPr id="2" name="">
             <a:extLst xmlns:a="http://schemas.openxmlformats.org/drawingml/2006/main">
               <a:ext uri="{FF2B5EF4-FFF2-40B4-BE49-F238E27FC236}">
-                <a16:creationId xmlns:a16="http://schemas.microsoft.com/office/drawing/2014/main" id="{4484A67A-B307-4960-83FE-444351A87A97}"/>
+                <a16:creationId xmlns:a16="http://schemas.microsoft.com/office/drawing/2014/main" id="{F2F924D4-560C-49FA-8ABE-F805B655BE44}"/>
               </a:ext>
             </a:extLst>
           </p:cNvPr>
@@ -6907,7 +6907,7 @@
           <p:cNvPr id="3" name="">
             <a:extLst xmlns:a="http://schemas.openxmlformats.org/drawingml/2006/main">
               <a:ext uri="{FF2B5EF4-FFF2-40B4-BE49-F238E27FC236}">
-                <a16:creationId xmlns:a16="http://schemas.microsoft.com/office/drawing/2014/main" id="{97689A05-197E-472F-9A96-B015C900085B}"/>
+                <a16:creationId xmlns:a16="http://schemas.microsoft.com/office/drawing/2014/main" id="{2FDD1B3E-A70C-45AC-8EFD-8684352D6D45}"/>
               </a:ext>
             </a:extLst>
           </p:cNvPr>
@@ -6939,7 +6939,7 @@
           <p:cNvPr id="4" name="">
             <a:extLst xmlns:a="http://schemas.openxmlformats.org/drawingml/2006/main">
               <a:ext uri="{FF2B5EF4-FFF2-40B4-BE49-F238E27FC236}">
-                <a16:creationId xmlns:a16="http://schemas.microsoft.com/office/drawing/2014/main" id="{0D98D62B-9D0B-468E-B4FE-29D1499D84BB}"/>
+                <a16:creationId xmlns:a16="http://schemas.microsoft.com/office/drawing/2014/main" id="{9F2131B4-5699-4144-9781-66D4F845A18A}"/>
               </a:ext>
             </a:extLst>
           </p:cNvPr>
@@ -6996,7 +6996,7 @@
           <p:cNvPr id="5" name="">
             <a:extLst xmlns:a="http://schemas.openxmlformats.org/drawingml/2006/main">
               <a:ext uri="{FF2B5EF4-FFF2-40B4-BE49-F238E27FC236}">
-                <a16:creationId xmlns:a16="http://schemas.microsoft.com/office/drawing/2014/main" id="{A3B50593-E6BE-436F-8C5F-8F5DF28248A4}"/>
+                <a16:creationId xmlns:a16="http://schemas.microsoft.com/office/drawing/2014/main" id="{B01D2AA4-6CD7-461D-AB81-9731613035C7}"/>
               </a:ext>
             </a:extLst>
           </p:cNvPr>
@@ -7053,7 +7053,7 @@
           <p:cNvPr id="6" name="">
             <a:extLst xmlns:a="http://schemas.openxmlformats.org/drawingml/2006/main">
               <a:ext uri="{FF2B5EF4-FFF2-40B4-BE49-F238E27FC236}">
-                <a16:creationId xmlns:a16="http://schemas.microsoft.com/office/drawing/2014/main" id="{7D698C66-56E9-4EBF-9747-AE81BFD74D31}"/>
+                <a16:creationId xmlns:a16="http://schemas.microsoft.com/office/drawing/2014/main" id="{7687DB5D-8931-411C-B0CD-3E7BF835CCB1}"/>
               </a:ext>
             </a:extLst>
           </p:cNvPr>
@@ -7110,7 +7110,7 @@
           <p:cNvPr id="7" name="">
             <a:extLst xmlns:a="http://schemas.openxmlformats.org/drawingml/2006/main">
               <a:ext uri="{FF2B5EF4-FFF2-40B4-BE49-F238E27FC236}">
-                <a16:creationId xmlns:a16="http://schemas.microsoft.com/office/drawing/2014/main" id="{6346347F-E597-454F-B2BC-DE9CA359B761}"/>
+                <a16:creationId xmlns:a16="http://schemas.microsoft.com/office/drawing/2014/main" id="{ECB32FC1-C96B-461E-A8BE-8796683C39E1}"/>
               </a:ext>
             </a:extLst>
           </p:cNvPr>
@@ -7142,7 +7142,7 @@
           <p:cNvPr id="8" name="">
             <a:extLst xmlns:a="http://schemas.openxmlformats.org/drawingml/2006/main">
               <a:ext uri="{FF2B5EF4-FFF2-40B4-BE49-F238E27FC236}">
-                <a16:creationId xmlns:a16="http://schemas.microsoft.com/office/drawing/2014/main" id="{3FAB27F0-A1EB-407B-B877-99E7EDFF0B21}"/>
+                <a16:creationId xmlns:a16="http://schemas.microsoft.com/office/drawing/2014/main" id="{9C4F8C5D-102E-4BB0-8305-8685BDB656ED}"/>
               </a:ext>
             </a:extLst>
           </p:cNvPr>
@@ -7199,7 +7199,7 @@
           <p:cNvPr id="9" name="">
             <a:extLst xmlns:a="http://schemas.openxmlformats.org/drawingml/2006/main">
               <a:ext uri="{FF2B5EF4-FFF2-40B4-BE49-F238E27FC236}">
-                <a16:creationId xmlns:a16="http://schemas.microsoft.com/office/drawing/2014/main" id="{96603498-C52D-4EDE-8DD1-C4D0EAEFABBC}"/>
+                <a16:creationId xmlns:a16="http://schemas.microsoft.com/office/drawing/2014/main" id="{0A9FFBA9-A0BD-491A-8999-3EAB552325CA}"/>
               </a:ext>
             </a:extLst>
           </p:cNvPr>
@@ -7256,7 +7256,7 @@
           <p:cNvPr id="10" name="">
             <a:extLst xmlns:a="http://schemas.openxmlformats.org/drawingml/2006/main">
               <a:ext uri="{FF2B5EF4-FFF2-40B4-BE49-F238E27FC236}">
-                <a16:creationId xmlns:a16="http://schemas.microsoft.com/office/drawing/2014/main" id="{9254C7A6-5685-4F8F-B15B-58B2799449A5}"/>
+                <a16:creationId xmlns:a16="http://schemas.microsoft.com/office/drawing/2014/main" id="{9FAF7486-E7E5-40DC-A63F-7DB1E57A8EB6}"/>
               </a:ext>
             </a:extLst>
           </p:cNvPr>
@@ -7313,7 +7313,7 @@
           <p:cNvPr id="11" name="">
             <a:extLst xmlns:a="http://schemas.openxmlformats.org/drawingml/2006/main">
               <a:ext uri="{FF2B5EF4-FFF2-40B4-BE49-F238E27FC236}">
-                <a16:creationId xmlns:a16="http://schemas.microsoft.com/office/drawing/2014/main" id="{4DBA41A1-41C2-47AA-9DA8-E5AC4B429CB4}"/>
+                <a16:creationId xmlns:a16="http://schemas.microsoft.com/office/drawing/2014/main" id="{5E620310-0FCE-470B-9CC1-D9A4320DF002}"/>
               </a:ext>
             </a:extLst>
           </p:cNvPr>
@@ -7345,7 +7345,7 @@
           <p:cNvPr id="12" name="">
             <a:extLst xmlns:a="http://schemas.openxmlformats.org/drawingml/2006/main">
               <a:ext uri="{FF2B5EF4-FFF2-40B4-BE49-F238E27FC236}">
-                <a16:creationId xmlns:a16="http://schemas.microsoft.com/office/drawing/2014/main" id="{05165633-89A5-44D1-92AD-9D108A4F9F27}"/>
+                <a16:creationId xmlns:a16="http://schemas.microsoft.com/office/drawing/2014/main" id="{744FBD33-4F1E-438F-B110-24D4CBFF5652}"/>
               </a:ext>
             </a:extLst>
           </p:cNvPr>
@@ -7402,7 +7402,7 @@
           <p:cNvPr id="13" name="">
             <a:extLst xmlns:a="http://schemas.openxmlformats.org/drawingml/2006/main">
               <a:ext uri="{FF2B5EF4-FFF2-40B4-BE49-F238E27FC236}">
-                <a16:creationId xmlns:a16="http://schemas.microsoft.com/office/drawing/2014/main" id="{D1B5C66E-D8AB-46BD-A6D2-AE21A4A48F11}"/>
+                <a16:creationId xmlns:a16="http://schemas.microsoft.com/office/drawing/2014/main" id="{6E30E267-5F29-4AC8-B4E7-BFB47A5D79E9}"/>
               </a:ext>
             </a:extLst>
           </p:cNvPr>
@@ -7459,7 +7459,7 @@
           <p:cNvPr id="14" name="">
             <a:extLst xmlns:a="http://schemas.openxmlformats.org/drawingml/2006/main">
               <a:ext uri="{FF2B5EF4-FFF2-40B4-BE49-F238E27FC236}">
-                <a16:creationId xmlns:a16="http://schemas.microsoft.com/office/drawing/2014/main" id="{6B2BC13F-DEC4-4932-A932-7B5F98C28BBB}"/>
+                <a16:creationId xmlns:a16="http://schemas.microsoft.com/office/drawing/2014/main" id="{9A4E082F-2CBA-4DBC-BCA1-9FB5DE41D014}"/>
               </a:ext>
             </a:extLst>
           </p:cNvPr>
@@ -7516,7 +7516,7 @@
           <p:cNvPr id="15" name="">
             <a:extLst xmlns:a="http://schemas.openxmlformats.org/drawingml/2006/main">
               <a:ext uri="{FF2B5EF4-FFF2-40B4-BE49-F238E27FC236}">
-                <a16:creationId xmlns:a16="http://schemas.microsoft.com/office/drawing/2014/main" id="{CFE3A05D-ED8F-4580-8A04-B4C6241D1BB8}"/>
+                <a16:creationId xmlns:a16="http://schemas.microsoft.com/office/drawing/2014/main" id="{761B90FF-B72A-4052-8862-49A7D19D1106}"/>
               </a:ext>
             </a:extLst>
           </p:cNvPr>
@@ -7571,7 +7571,7 @@
     </p:spTree>
     <p:extLst>
       <p:ext uri="{BB962C8B-B14F-4D97-AF65-F5344CB8AC3E}">
-        <p14:creationId xmlns:p14="http://schemas.microsoft.com/office/powerpoint/2010/main" val="839012356"/>
+        <p14:creationId xmlns:p14="http://schemas.microsoft.com/office/powerpoint/2010/main" val="435301728"/>
       </p:ext>
     </p:extLst>
   </p:cSld>
@@ -7772,7 +7772,7 @@
           <p:cNvPr id="23" name="">
             <a:extLst xmlns:a="http://schemas.openxmlformats.org/drawingml/2006/main">
               <a:ext uri="{FF2B5EF4-FFF2-40B4-BE49-F238E27FC236}">
-                <a16:creationId xmlns:a16="http://schemas.microsoft.com/office/drawing/2014/main" id="{F4FDE0CB-1642-4C40-B476-3C3894EC575C}"/>
+                <a16:creationId xmlns:a16="http://schemas.microsoft.com/office/drawing/2014/main" id="{94528AC1-60DF-41AF-8BC5-1E7CAA41C0F2}"/>
               </a:ext>
             </a:extLst>
           </p:cNvPr>
@@ -7804,7 +7804,7 @@
           <p:cNvPr id="2" name="">
             <a:extLst xmlns:a="http://schemas.openxmlformats.org/drawingml/2006/main">
               <a:ext uri="{FF2B5EF4-FFF2-40B4-BE49-F238E27FC236}">
-                <a16:creationId xmlns:a16="http://schemas.microsoft.com/office/drawing/2014/main" id="{2E425992-B990-4AD6-B7BC-B982BEBB01A6}"/>
+                <a16:creationId xmlns:a16="http://schemas.microsoft.com/office/drawing/2014/main" id="{B94E6FEB-DE54-40A3-A658-AC80A61B83C8}"/>
               </a:ext>
             </a:extLst>
           </p:cNvPr>
@@ -7861,7 +7861,7 @@
           <p:cNvPr id="3" name="">
             <a:extLst xmlns:a="http://schemas.openxmlformats.org/drawingml/2006/main">
               <a:ext uri="{FF2B5EF4-FFF2-40B4-BE49-F238E27FC236}">
-                <a16:creationId xmlns:a16="http://schemas.microsoft.com/office/drawing/2014/main" id="{852711C9-B92F-4210-BDC4-AEF7DD00E62F}"/>
+                <a16:creationId xmlns:a16="http://schemas.microsoft.com/office/drawing/2014/main" id="{3118CFFC-CF9F-4EAA-B86B-0FAC3C70ADA0}"/>
               </a:ext>
             </a:extLst>
           </p:cNvPr>
@@ -7893,7 +7893,7 @@
           <p:cNvPr id="4" name="">
             <a:extLst xmlns:a="http://schemas.openxmlformats.org/drawingml/2006/main">
               <a:ext uri="{FF2B5EF4-FFF2-40B4-BE49-F238E27FC236}">
-                <a16:creationId xmlns:a16="http://schemas.microsoft.com/office/drawing/2014/main" id="{66454C88-B1BE-442C-9049-99BE7275E6B9}"/>
+                <a16:creationId xmlns:a16="http://schemas.microsoft.com/office/drawing/2014/main" id="{7BFA8B60-C00C-42A4-AE69-6436788D77E2}"/>
               </a:ext>
             </a:extLst>
           </p:cNvPr>
@@ -7950,7 +7950,7 @@
           <p:cNvPr id="5" name="">
             <a:extLst xmlns:a="http://schemas.openxmlformats.org/drawingml/2006/main">
               <a:ext uri="{FF2B5EF4-FFF2-40B4-BE49-F238E27FC236}">
-                <a16:creationId xmlns:a16="http://schemas.microsoft.com/office/drawing/2014/main" id="{2CC7F5B5-C646-40B3-A86F-7FB16339761E}"/>
+                <a16:creationId xmlns:a16="http://schemas.microsoft.com/office/drawing/2014/main" id="{F9732A23-6826-43A5-BD64-8A0FA636DC52}"/>
               </a:ext>
             </a:extLst>
           </p:cNvPr>
@@ -8007,7 +8007,7 @@
           <p:cNvPr id="6" name="">
             <a:extLst xmlns:a="http://schemas.openxmlformats.org/drawingml/2006/main">
               <a:ext uri="{FF2B5EF4-FFF2-40B4-BE49-F238E27FC236}">
-                <a16:creationId xmlns:a16="http://schemas.microsoft.com/office/drawing/2014/main" id="{3B217932-DCD3-4D4A-A588-252EB3AC834B}"/>
+                <a16:creationId xmlns:a16="http://schemas.microsoft.com/office/drawing/2014/main" id="{D260977C-919A-471B-8481-36D267358FFE}"/>
               </a:ext>
             </a:extLst>
           </p:cNvPr>
@@ -8064,7 +8064,7 @@
           <p:cNvPr id="7" name="">
             <a:extLst xmlns:a="http://schemas.openxmlformats.org/drawingml/2006/main">
               <a:ext uri="{FF2B5EF4-FFF2-40B4-BE49-F238E27FC236}">
-                <a16:creationId xmlns:a16="http://schemas.microsoft.com/office/drawing/2014/main" id="{B97FA97E-C5FC-4371-9405-0DD6CF88A91C}"/>
+                <a16:creationId xmlns:a16="http://schemas.microsoft.com/office/drawing/2014/main" id="{E46AEE53-B7C7-4FBE-A9E9-101BD736D34B}"/>
               </a:ext>
             </a:extLst>
           </p:cNvPr>
@@ -8096,7 +8096,7 @@
           <p:cNvPr id="8" name="">
             <a:extLst xmlns:a="http://schemas.openxmlformats.org/drawingml/2006/main">
               <a:ext uri="{FF2B5EF4-FFF2-40B4-BE49-F238E27FC236}">
-                <a16:creationId xmlns:a16="http://schemas.microsoft.com/office/drawing/2014/main" id="{9491B1E1-69FE-4FAB-978A-FA4DA32F77E9}"/>
+                <a16:creationId xmlns:a16="http://schemas.microsoft.com/office/drawing/2014/main" id="{3D6611C9-0F07-4EC2-A294-993273DC6BCD}"/>
               </a:ext>
             </a:extLst>
           </p:cNvPr>
@@ -8153,7 +8153,7 @@
           <p:cNvPr id="9" name="">
             <a:extLst xmlns:a="http://schemas.openxmlformats.org/drawingml/2006/main">
               <a:ext uri="{FF2B5EF4-FFF2-40B4-BE49-F238E27FC236}">
-                <a16:creationId xmlns:a16="http://schemas.microsoft.com/office/drawing/2014/main" id="{AC2A55F6-988F-4150-8C75-1E2DE5F2FFC7}"/>
+                <a16:creationId xmlns:a16="http://schemas.microsoft.com/office/drawing/2014/main" id="{753AF5E4-0728-46F1-A752-111FF948991B}"/>
               </a:ext>
             </a:extLst>
           </p:cNvPr>
@@ -8210,19 +8210,19 @@
           <p:cNvPr id="10" name="">
             <a:extLst xmlns:a="http://schemas.openxmlformats.org/drawingml/2006/main">
               <a:ext uri="{FF2B5EF4-FFF2-40B4-BE49-F238E27FC236}">
-                <a16:creationId xmlns:a16="http://schemas.microsoft.com/office/drawing/2014/main" id="{960C87DF-DD17-444A-9CBC-A5748E8258D5}"/>
-              </a:ext>
-            </a:extLst>
-          </p:cNvPr>
-          <p:cNvSpPr>
-            <a:spLocks xmlns:a="http://schemas.openxmlformats.org/drawingml/2006/main" noGrp="1"/>
-          </p:cNvSpPr>
-          <p:nvPr/>
-        </p:nvSpPr>
-        <p:spPr>
-          <a:xfrm xmlns:a="http://schemas.openxmlformats.org/drawingml/2006/main">
-            <a:off x="914400" y="1257300"/>
-            <a:ext cx="10363200" cy="781050"/>
+                <a16:creationId xmlns:a16="http://schemas.microsoft.com/office/drawing/2014/main" id="{7C228013-8742-4515-85E8-BAD3C544918D}"/>
+              </a:ext>
+            </a:extLst>
+          </p:cNvPr>
+          <p:cNvSpPr>
+            <a:spLocks xmlns:a="http://schemas.openxmlformats.org/drawingml/2006/main" noGrp="1"/>
+          </p:cNvSpPr>
+          <p:nvPr/>
+        </p:nvSpPr>
+        <p:spPr>
+          <a:xfrm xmlns:a="http://schemas.openxmlformats.org/drawingml/2006/main">
+            <a:off x="857250" y="1219200"/>
+            <a:ext cx="10477500" cy="742950"/>
           </a:xfrm>
           <a:prstGeom xmlns:a="http://schemas.openxmlformats.org/drawingml/2006/main" prst="rect">
             <a:avLst/>
@@ -8239,7 +8239,7 @@
           <a:lstStyle xmlns:a="http://schemas.openxmlformats.org/drawingml/2006/main"/>
           <a:p xmlns:a="http://schemas.openxmlformats.org/drawingml/2006/main">
             <a:pPr algn="ctr">
-              <a:defRPr sz="2175" b="1">
+              <a:defRPr sz="2100" b="1">
                 <a:solidFill>
                   <a:srgbClr val="17253A"/>
                 </a:solidFill>
@@ -8249,7 +8249,7 @@
               </a:defRPr>
             </a:pPr>
             <a:r>
-              <a:rPr sz="2175" b="1">
+              <a:rPr sz="2100" b="1">
                 <a:solidFill>
                   <a:srgbClr val="17253A"/>
                 </a:solidFill>
@@ -8267,28 +8267,30 @@
           <p:cNvPr id="11" name="">
             <a:extLst xmlns:a="http://schemas.openxmlformats.org/drawingml/2006/main">
               <a:ext uri="{FF2B5EF4-FFF2-40B4-BE49-F238E27FC236}">
-                <a16:creationId xmlns:a16="http://schemas.microsoft.com/office/drawing/2014/main" id="{E49E18FB-5928-478D-A4A6-75AE703F87AA}"/>
-              </a:ext>
-            </a:extLst>
-          </p:cNvPr>
-          <p:cNvSpPr>
-            <a:spLocks xmlns:a="http://schemas.openxmlformats.org/drawingml/2006/main" noGrp="1"/>
-          </p:cNvSpPr>
-          <p:nvPr/>
-        </p:nvSpPr>
-        <p:spPr>
-          <a:xfrm xmlns:a="http://schemas.openxmlformats.org/drawingml/2006/main">
-            <a:off x="1000125" y="2247900"/>
-            <a:ext cx="476250" cy="476250"/>
-          </a:xfrm>
-          <a:prstGeom xmlns:a="http://schemas.openxmlformats.org/drawingml/2006/main" prst="ellipse">
+                <a16:creationId xmlns:a16="http://schemas.microsoft.com/office/drawing/2014/main" id="{D46A5C64-8E5A-49EC-892C-97A3ADF19595}"/>
+              </a:ext>
+            </a:extLst>
+          </p:cNvPr>
+          <p:cNvSpPr>
+            <a:spLocks xmlns:a="http://schemas.openxmlformats.org/drawingml/2006/main" noGrp="1"/>
+          </p:cNvSpPr>
+          <p:nvPr/>
+        </p:nvSpPr>
+        <p:spPr>
+          <a:xfrm xmlns:a="http://schemas.openxmlformats.org/drawingml/2006/main">
+            <a:off x="971550" y="2124075"/>
+            <a:ext cx="38100" cy="3524250"/>
+          </a:xfrm>
+          <a:prstGeom xmlns:a="http://schemas.openxmlformats.org/drawingml/2006/main" prst="rect">
             <a:avLst/>
           </a:prstGeom>
           <a:solidFill xmlns:a="http://schemas.openxmlformats.org/drawingml/2006/main">
-            <a:srgbClr val="18324A"/>
+            <a:srgbClr val="2C6E73"/>
           </a:solidFill>
           <a:ln xmlns:a="http://schemas.openxmlformats.org/drawingml/2006/main" w="0">
-            <a:noFill/>
+            <a:solidFill>
+              <a:srgbClr val="2C6E73"/>
+            </a:solidFill>
           </a:ln>
         </p:spPr>
       </p:sp>
@@ -8297,19 +8299,19 @@
           <p:cNvPr id="12" name="">
             <a:extLst xmlns:a="http://schemas.openxmlformats.org/drawingml/2006/main">
               <a:ext uri="{FF2B5EF4-FFF2-40B4-BE49-F238E27FC236}">
-                <a16:creationId xmlns:a16="http://schemas.microsoft.com/office/drawing/2014/main" id="{D0CDC9CD-6D54-485A-887D-3720ADC872CF}"/>
-              </a:ext>
-            </a:extLst>
-          </p:cNvPr>
-          <p:cNvSpPr>
-            <a:spLocks xmlns:a="http://schemas.openxmlformats.org/drawingml/2006/main" noGrp="1"/>
-          </p:cNvSpPr>
-          <p:nvPr/>
-        </p:nvSpPr>
-        <p:spPr>
-          <a:xfrm xmlns:a="http://schemas.openxmlformats.org/drawingml/2006/main">
-            <a:off x="1000125" y="2276475"/>
-            <a:ext cx="476250" cy="419100"/>
+                <a16:creationId xmlns:a16="http://schemas.microsoft.com/office/drawing/2014/main" id="{ED333F1E-73A8-4BFD-B2C2-8DDD648C425C}"/>
+              </a:ext>
+            </a:extLst>
+          </p:cNvPr>
+          <p:cNvSpPr>
+            <a:spLocks xmlns:a="http://schemas.openxmlformats.org/drawingml/2006/main" noGrp="1"/>
+          </p:cNvSpPr>
+          <p:nvPr/>
+        </p:nvSpPr>
+        <p:spPr>
+          <a:xfrm xmlns:a="http://schemas.openxmlformats.org/drawingml/2006/main">
+            <a:off x="1162050" y="2200275"/>
+            <a:ext cx="400050" cy="400050"/>
           </a:xfrm>
           <a:prstGeom xmlns:a="http://schemas.openxmlformats.org/drawingml/2006/main" prst="rect">
             <a:avLst/>
@@ -8326,9 +8328,9 @@
           <a:lstStyle xmlns:a="http://schemas.openxmlformats.org/drawingml/2006/main"/>
           <a:p xmlns:a="http://schemas.openxmlformats.org/drawingml/2006/main">
             <a:pPr algn="ctr">
-              <a:defRPr sz="1350" b="1">
-                <a:solidFill>
-                  <a:srgbClr val="FFFFFF"/>
+              <a:defRPr sz="1125" b="1">
+                <a:solidFill>
+                  <a:srgbClr val="2C6E73"/>
                 </a:solidFill>
                 <a:latin typeface="Arial"/>
                 <a:ea typeface="Arial"/>
@@ -8336,9 +8338,9 @@
               </a:defRPr>
             </a:pPr>
             <a:r>
-              <a:rPr sz="1350" b="1">
-                <a:solidFill>
-                  <a:srgbClr val="FFFFFF"/>
+              <a:rPr sz="1125" b="1">
+                <a:solidFill>
+                  <a:srgbClr val="2C6E73"/>
                 </a:solidFill>
                 <a:latin typeface="Arial"/>
                 <a:ea typeface="Arial"/>
@@ -8354,19 +8356,19 @@
           <p:cNvPr id="13" name="">
             <a:extLst xmlns:a="http://schemas.openxmlformats.org/drawingml/2006/main">
               <a:ext uri="{FF2B5EF4-FFF2-40B4-BE49-F238E27FC236}">
-                <a16:creationId xmlns:a16="http://schemas.microsoft.com/office/drawing/2014/main" id="{B104984C-D78E-451E-AC07-AB495AEA3669}"/>
-              </a:ext>
-            </a:extLst>
-          </p:cNvPr>
-          <p:cNvSpPr>
-            <a:spLocks xmlns:a="http://schemas.openxmlformats.org/drawingml/2006/main" noGrp="1"/>
-          </p:cNvSpPr>
-          <p:nvPr/>
-        </p:nvSpPr>
-        <p:spPr>
-          <a:xfrm xmlns:a="http://schemas.openxmlformats.org/drawingml/2006/main">
-            <a:off x="1714500" y="2181225"/>
-            <a:ext cx="9429750" cy="609600"/>
+                <a16:creationId xmlns:a16="http://schemas.microsoft.com/office/drawing/2014/main" id="{30D87E85-112D-448C-85A4-2EB4EA34E27F}"/>
+              </a:ext>
+            </a:extLst>
+          </p:cNvPr>
+          <p:cNvSpPr>
+            <a:spLocks xmlns:a="http://schemas.openxmlformats.org/drawingml/2006/main" noGrp="1"/>
+          </p:cNvSpPr>
+          <p:nvPr/>
+        </p:nvSpPr>
+        <p:spPr>
+          <a:xfrm xmlns:a="http://schemas.openxmlformats.org/drawingml/2006/main">
+            <a:off x="1714500" y="2114550"/>
+            <a:ext cx="9525000" cy="809625"/>
           </a:xfrm>
           <a:prstGeom xmlns:a="http://schemas.openxmlformats.org/drawingml/2006/main" prst="rect">
             <a:avLst/>
@@ -8383,7 +8385,7 @@
           <a:lstStyle xmlns:a="http://schemas.openxmlformats.org/drawingml/2006/main"/>
           <a:p xmlns:a="http://schemas.openxmlformats.org/drawingml/2006/main">
             <a:pPr algn="l">
-              <a:defRPr sz="1500" b="0">
+              <a:defRPr sz="1725" b="0">
                 <a:solidFill>
                   <a:srgbClr val="17253A"/>
                 </a:solidFill>
@@ -8393,7 +8395,7 @@
               </a:defRPr>
             </a:pPr>
             <a:r>
-              <a:rPr sz="1500" b="0">
+              <a:rPr sz="1725" b="0">
                 <a:solidFill>
                   <a:srgbClr val="17253A"/>
                 </a:solidFill>
@@ -8401,7 +8403,7 @@
                 <a:ea typeface="Arial"/>
                 <a:cs typeface="Arial"/>
               </a:rPr>
-              <a:t>Identify the structure: Read or record x before y and note the quadrant.</a:t>
+              <a:t>End point (7, -4)</a:t>
             </a:r>
           </a:p>
         </p:txBody>
@@ -8411,28 +8413,30 @@
           <p:cNvPr id="14" name="">
             <a:extLst xmlns:a="http://schemas.openxmlformats.org/drawingml/2006/main">
               <a:ext uri="{FF2B5EF4-FFF2-40B4-BE49-F238E27FC236}">
-                <a16:creationId xmlns:a16="http://schemas.microsoft.com/office/drawing/2014/main" id="{48C68959-C0A2-4B57-BD37-52790E73C475}"/>
-              </a:ext>
-            </a:extLst>
-          </p:cNvPr>
-          <p:cNvSpPr>
-            <a:spLocks xmlns:a="http://schemas.openxmlformats.org/drawingml/2006/main" noGrp="1"/>
-          </p:cNvSpPr>
-          <p:nvPr/>
-        </p:nvSpPr>
-        <p:spPr>
-          <a:xfrm xmlns:a="http://schemas.openxmlformats.org/drawingml/2006/main">
-            <a:off x="1000125" y="2990850"/>
-            <a:ext cx="476250" cy="476250"/>
-          </a:xfrm>
-          <a:prstGeom xmlns:a="http://schemas.openxmlformats.org/drawingml/2006/main" prst="ellipse">
+                <a16:creationId xmlns:a16="http://schemas.microsoft.com/office/drawing/2014/main" id="{C54E62CE-2473-425D-B6E4-28891DCEB5CA}"/>
+              </a:ext>
+            </a:extLst>
+          </p:cNvPr>
+          <p:cNvSpPr>
+            <a:spLocks xmlns:a="http://schemas.openxmlformats.org/drawingml/2006/main" noGrp="1"/>
+          </p:cNvSpPr>
+          <p:nvPr/>
+        </p:nvSpPr>
+        <p:spPr>
+          <a:xfrm xmlns:a="http://schemas.openxmlformats.org/drawingml/2006/main">
+            <a:off x="1714500" y="2943225"/>
+            <a:ext cx="9334500" cy="9525"/>
+          </a:xfrm>
+          <a:prstGeom xmlns:a="http://schemas.openxmlformats.org/drawingml/2006/main" prst="rect">
             <a:avLst/>
           </a:prstGeom>
           <a:solidFill xmlns:a="http://schemas.openxmlformats.org/drawingml/2006/main">
-            <a:srgbClr val="2C6E73"/>
+            <a:srgbClr val="D9E0E6"/>
           </a:solidFill>
           <a:ln xmlns:a="http://schemas.openxmlformats.org/drawingml/2006/main" w="0">
-            <a:noFill/>
+            <a:solidFill>
+              <a:srgbClr val="D9E0E6"/>
+            </a:solidFill>
           </a:ln>
         </p:spPr>
       </p:sp>
@@ -8441,19 +8445,19 @@
           <p:cNvPr id="15" name="">
             <a:extLst xmlns:a="http://schemas.openxmlformats.org/drawingml/2006/main">
               <a:ext uri="{FF2B5EF4-FFF2-40B4-BE49-F238E27FC236}">
-                <a16:creationId xmlns:a16="http://schemas.microsoft.com/office/drawing/2014/main" id="{D47970D6-4DD1-42EE-B7E4-A4F81611DF0E}"/>
-              </a:ext>
-            </a:extLst>
-          </p:cNvPr>
-          <p:cNvSpPr>
-            <a:spLocks xmlns:a="http://schemas.openxmlformats.org/drawingml/2006/main" noGrp="1"/>
-          </p:cNvSpPr>
-          <p:nvPr/>
-        </p:nvSpPr>
-        <p:spPr>
-          <a:xfrm xmlns:a="http://schemas.openxmlformats.org/drawingml/2006/main">
-            <a:off x="1000125" y="3019425"/>
-            <a:ext cx="476250" cy="419100"/>
+                <a16:creationId xmlns:a16="http://schemas.microsoft.com/office/drawing/2014/main" id="{925F1FD4-E9CF-46AB-A991-C5E69AC316FE}"/>
+              </a:ext>
+            </a:extLst>
+          </p:cNvPr>
+          <p:cNvSpPr>
+            <a:spLocks xmlns:a="http://schemas.openxmlformats.org/drawingml/2006/main" noGrp="1"/>
+          </p:cNvSpPr>
+          <p:nvPr/>
+        </p:nvSpPr>
+        <p:spPr>
+          <a:xfrm xmlns:a="http://schemas.openxmlformats.org/drawingml/2006/main">
+            <a:off x="1162050" y="3076575"/>
+            <a:ext cx="400050" cy="400050"/>
           </a:xfrm>
           <a:prstGeom xmlns:a="http://schemas.openxmlformats.org/drawingml/2006/main" prst="rect">
             <a:avLst/>
@@ -8470,9 +8474,9 @@
           <a:lstStyle xmlns:a="http://schemas.openxmlformats.org/drawingml/2006/main"/>
           <a:p xmlns:a="http://schemas.openxmlformats.org/drawingml/2006/main">
             <a:pPr algn="ctr">
-              <a:defRPr sz="1350" b="1">
-                <a:solidFill>
-                  <a:srgbClr val="FFFFFF"/>
+              <a:defRPr sz="1125" b="1">
+                <a:solidFill>
+                  <a:srgbClr val="2C6E73"/>
                 </a:solidFill>
                 <a:latin typeface="Arial"/>
                 <a:ea typeface="Arial"/>
@@ -8480,9 +8484,9 @@
               </a:defRPr>
             </a:pPr>
             <a:r>
-              <a:rPr sz="1350" b="1">
-                <a:solidFill>
-                  <a:srgbClr val="FFFFFF"/>
+              <a:rPr sz="1125" b="1">
+                <a:solidFill>
+                  <a:srgbClr val="2C6E73"/>
                 </a:solidFill>
                 <a:latin typeface="Arial"/>
                 <a:ea typeface="Arial"/>
@@ -8498,19 +8502,19 @@
           <p:cNvPr id="16" name="">
             <a:extLst xmlns:a="http://schemas.openxmlformats.org/drawingml/2006/main">
               <a:ext uri="{FF2B5EF4-FFF2-40B4-BE49-F238E27FC236}">
-                <a16:creationId xmlns:a16="http://schemas.microsoft.com/office/drawing/2014/main" id="{08F5490A-21BF-45FE-9F26-5AF75939E909}"/>
-              </a:ext>
-            </a:extLst>
-          </p:cNvPr>
-          <p:cNvSpPr>
-            <a:spLocks xmlns:a="http://schemas.openxmlformats.org/drawingml/2006/main" noGrp="1"/>
-          </p:cNvSpPr>
-          <p:nvPr/>
-        </p:nvSpPr>
-        <p:spPr>
-          <a:xfrm xmlns:a="http://schemas.openxmlformats.org/drawingml/2006/main">
-            <a:off x="1714500" y="2924175"/>
-            <a:ext cx="9429750" cy="609600"/>
+                <a16:creationId xmlns:a16="http://schemas.microsoft.com/office/drawing/2014/main" id="{10212F38-A824-4951-BDF6-B8204E90BFAD}"/>
+              </a:ext>
+            </a:extLst>
+          </p:cNvPr>
+          <p:cNvSpPr>
+            <a:spLocks xmlns:a="http://schemas.openxmlformats.org/drawingml/2006/main" noGrp="1"/>
+          </p:cNvSpPr>
+          <p:nvPr/>
+        </p:nvSpPr>
+        <p:spPr>
+          <a:xfrm xmlns:a="http://schemas.openxmlformats.org/drawingml/2006/main">
+            <a:off x="1714500" y="2990850"/>
+            <a:ext cx="9525000" cy="809625"/>
           </a:xfrm>
           <a:prstGeom xmlns:a="http://schemas.openxmlformats.org/drawingml/2006/main" prst="rect">
             <a:avLst/>
@@ -8527,7 +8531,7 @@
           <a:lstStyle xmlns:a="http://schemas.openxmlformats.org/drawingml/2006/main"/>
           <a:p xmlns:a="http://schemas.openxmlformats.org/drawingml/2006/main">
             <a:pPr algn="l">
-              <a:defRPr sz="1500" b="0">
+              <a:defRPr sz="1725" b="0">
                 <a:solidFill>
                   <a:srgbClr val="17253A"/>
                 </a:solidFill>
@@ -8537,7 +8541,7 @@
               </a:defRPr>
             </a:pPr>
             <a:r>
-              <a:rPr sz="1500" b="0">
+              <a:rPr sz="1725" b="0">
                 <a:solidFill>
                   <a:srgbClr val="17253A"/>
                 </a:solidFill>
@@ -8545,7 +8549,7 @@
                 <a:ea typeface="Arial"/>
                 <a:cs typeface="Arial"/>
               </a:rPr>
-              <a:t>Set up the method: Apply the same vector or mirror line to every vertex.</a:t>
+              <a:t>Reverse 9 right: 7 - 9 = -2</a:t>
             </a:r>
           </a:p>
         </p:txBody>
@@ -8555,28 +8559,30 @@
           <p:cNvPr id="17" name="">
             <a:extLst xmlns:a="http://schemas.openxmlformats.org/drawingml/2006/main">
               <a:ext uri="{FF2B5EF4-FFF2-40B4-BE49-F238E27FC236}">
-                <a16:creationId xmlns:a16="http://schemas.microsoft.com/office/drawing/2014/main" id="{A81DDB08-4CEF-4D3C-AF3A-3CC166ED0D6D}"/>
-              </a:ext>
-            </a:extLst>
-          </p:cNvPr>
-          <p:cNvSpPr>
-            <a:spLocks xmlns:a="http://schemas.openxmlformats.org/drawingml/2006/main" noGrp="1"/>
-          </p:cNvSpPr>
-          <p:nvPr/>
-        </p:nvSpPr>
-        <p:spPr>
-          <a:xfrm xmlns:a="http://schemas.openxmlformats.org/drawingml/2006/main">
-            <a:off x="1000125" y="3733800"/>
-            <a:ext cx="476250" cy="476250"/>
-          </a:xfrm>
-          <a:prstGeom xmlns:a="http://schemas.openxmlformats.org/drawingml/2006/main" prst="ellipse">
+                <a16:creationId xmlns:a16="http://schemas.microsoft.com/office/drawing/2014/main" id="{ED8F0EB0-74C9-4EF3-BA51-91B00D05120A}"/>
+              </a:ext>
+            </a:extLst>
+          </p:cNvPr>
+          <p:cNvSpPr>
+            <a:spLocks xmlns:a="http://schemas.openxmlformats.org/drawingml/2006/main" noGrp="1"/>
+          </p:cNvSpPr>
+          <p:nvPr/>
+        </p:nvSpPr>
+        <p:spPr>
+          <a:xfrm xmlns:a="http://schemas.openxmlformats.org/drawingml/2006/main">
+            <a:off x="1714500" y="3819525"/>
+            <a:ext cx="9334500" cy="9525"/>
+          </a:xfrm>
+          <a:prstGeom xmlns:a="http://schemas.openxmlformats.org/drawingml/2006/main" prst="rect">
             <a:avLst/>
           </a:prstGeom>
           <a:solidFill xmlns:a="http://schemas.openxmlformats.org/drawingml/2006/main">
-            <a:srgbClr val="2C6E73"/>
+            <a:srgbClr val="D9E0E6"/>
           </a:solidFill>
           <a:ln xmlns:a="http://schemas.openxmlformats.org/drawingml/2006/main" w="0">
-            <a:noFill/>
+            <a:solidFill>
+              <a:srgbClr val="D9E0E6"/>
+            </a:solidFill>
           </a:ln>
         </p:spPr>
       </p:sp>
@@ -8585,19 +8591,19 @@
           <p:cNvPr id="18" name="">
             <a:extLst xmlns:a="http://schemas.openxmlformats.org/drawingml/2006/main">
               <a:ext uri="{FF2B5EF4-FFF2-40B4-BE49-F238E27FC236}">
-                <a16:creationId xmlns:a16="http://schemas.microsoft.com/office/drawing/2014/main" id="{6F73DA0A-948C-4CD9-87DF-CE0E425BC9B7}"/>
-              </a:ext>
-            </a:extLst>
-          </p:cNvPr>
-          <p:cNvSpPr>
-            <a:spLocks xmlns:a="http://schemas.openxmlformats.org/drawingml/2006/main" noGrp="1"/>
-          </p:cNvSpPr>
-          <p:nvPr/>
-        </p:nvSpPr>
-        <p:spPr>
-          <a:xfrm xmlns:a="http://schemas.openxmlformats.org/drawingml/2006/main">
-            <a:off x="1000125" y="3762375"/>
-            <a:ext cx="476250" cy="419100"/>
+                <a16:creationId xmlns:a16="http://schemas.microsoft.com/office/drawing/2014/main" id="{A2301EC7-595D-4489-B0D1-0CAC7EF9D108}"/>
+              </a:ext>
+            </a:extLst>
+          </p:cNvPr>
+          <p:cNvSpPr>
+            <a:spLocks xmlns:a="http://schemas.openxmlformats.org/drawingml/2006/main" noGrp="1"/>
+          </p:cNvSpPr>
+          <p:nvPr/>
+        </p:nvSpPr>
+        <p:spPr>
+          <a:xfrm xmlns:a="http://schemas.openxmlformats.org/drawingml/2006/main">
+            <a:off x="1162050" y="3952875"/>
+            <a:ext cx="400050" cy="400050"/>
           </a:xfrm>
           <a:prstGeom xmlns:a="http://schemas.openxmlformats.org/drawingml/2006/main" prst="rect">
             <a:avLst/>
@@ -8614,9 +8620,9 @@
           <a:lstStyle xmlns:a="http://schemas.openxmlformats.org/drawingml/2006/main"/>
           <a:p xmlns:a="http://schemas.openxmlformats.org/drawingml/2006/main">
             <a:pPr algn="ctr">
-              <a:defRPr sz="1350" b="1">
-                <a:solidFill>
-                  <a:srgbClr val="FFFFFF"/>
+              <a:defRPr sz="1125" b="1">
+                <a:solidFill>
+                  <a:srgbClr val="2C6E73"/>
                 </a:solidFill>
                 <a:latin typeface="Arial"/>
                 <a:ea typeface="Arial"/>
@@ -8624,9 +8630,9 @@
               </a:defRPr>
             </a:pPr>
             <a:r>
-              <a:rPr sz="1350" b="1">
-                <a:solidFill>
-                  <a:srgbClr val="FFFFFF"/>
+              <a:rPr sz="1125" b="1">
+                <a:solidFill>
+                  <a:srgbClr val="2C6E73"/>
                 </a:solidFill>
                 <a:latin typeface="Arial"/>
                 <a:ea typeface="Arial"/>
@@ -8642,19 +8648,19 @@
           <p:cNvPr id="19" name="">
             <a:extLst xmlns:a="http://schemas.openxmlformats.org/drawingml/2006/main">
               <a:ext uri="{FF2B5EF4-FFF2-40B4-BE49-F238E27FC236}">
-                <a16:creationId xmlns:a16="http://schemas.microsoft.com/office/drawing/2014/main" id="{7F5E2363-C253-49C3-9D0A-A216C2540E03}"/>
-              </a:ext>
-            </a:extLst>
-          </p:cNvPr>
-          <p:cNvSpPr>
-            <a:spLocks xmlns:a="http://schemas.openxmlformats.org/drawingml/2006/main" noGrp="1"/>
-          </p:cNvSpPr>
-          <p:nvPr/>
-        </p:nvSpPr>
-        <p:spPr>
-          <a:xfrm xmlns:a="http://schemas.openxmlformats.org/drawingml/2006/main">
-            <a:off x="1714500" y="3667125"/>
-            <a:ext cx="9429750" cy="609600"/>
+                <a16:creationId xmlns:a16="http://schemas.microsoft.com/office/drawing/2014/main" id="{9C66F48E-D75A-4331-8BA3-C3A6F5D528DA}"/>
+              </a:ext>
+            </a:extLst>
+          </p:cNvPr>
+          <p:cNvSpPr>
+            <a:spLocks xmlns:a="http://schemas.openxmlformats.org/drawingml/2006/main" noGrp="1"/>
+          </p:cNvSpPr>
+          <p:nvPr/>
+        </p:nvSpPr>
+        <p:spPr>
+          <a:xfrm xmlns:a="http://schemas.openxmlformats.org/drawingml/2006/main">
+            <a:off x="1714500" y="3867150"/>
+            <a:ext cx="9525000" cy="809625"/>
           </a:xfrm>
           <a:prstGeom xmlns:a="http://schemas.openxmlformats.org/drawingml/2006/main" prst="rect">
             <a:avLst/>
@@ -8671,7 +8677,7 @@
           <a:lstStyle xmlns:a="http://schemas.openxmlformats.org/drawingml/2006/main"/>
           <a:p xmlns:a="http://schemas.openxmlformats.org/drawingml/2006/main">
             <a:pPr algn="l">
-              <a:defRPr sz="1500" b="0">
+              <a:defRPr sz="1725" b="0">
                 <a:solidFill>
                   <a:srgbClr val="17253A"/>
                 </a:solidFill>
@@ -8681,7 +8687,7 @@
               </a:defRPr>
             </a:pPr>
             <a:r>
-              <a:rPr sz="1500" b="0">
+              <a:rPr sz="1725" b="0">
                 <a:solidFill>
                   <a:srgbClr val="17253A"/>
                 </a:solidFill>
@@ -8689,7 +8695,7 @@
                 <a:ea typeface="Arial"/>
                 <a:cs typeface="Arial"/>
               </a:rPr>
-              <a:t>Complete the calculation: (-2, -1).</a:t>
+              <a:t>Reverse 3 down: -4 + 3 = -1</a:t>
             </a:r>
           </a:p>
         </p:txBody>
@@ -8699,28 +8705,30 @@
           <p:cNvPr id="20" name="">
             <a:extLst xmlns:a="http://schemas.openxmlformats.org/drawingml/2006/main">
               <a:ext uri="{FF2B5EF4-FFF2-40B4-BE49-F238E27FC236}">
-                <a16:creationId xmlns:a16="http://schemas.microsoft.com/office/drawing/2014/main" id="{E39D3917-0DBB-4121-9541-4619A6F1C798}"/>
-              </a:ext>
-            </a:extLst>
-          </p:cNvPr>
-          <p:cNvSpPr>
-            <a:spLocks xmlns:a="http://schemas.openxmlformats.org/drawingml/2006/main" noGrp="1"/>
-          </p:cNvSpPr>
-          <p:nvPr/>
-        </p:nvSpPr>
-        <p:spPr>
-          <a:xfrm xmlns:a="http://schemas.openxmlformats.org/drawingml/2006/main">
-            <a:off x="1000125" y="4476750"/>
-            <a:ext cx="476250" cy="476250"/>
-          </a:xfrm>
-          <a:prstGeom xmlns:a="http://schemas.openxmlformats.org/drawingml/2006/main" prst="ellipse">
+                <a16:creationId xmlns:a16="http://schemas.microsoft.com/office/drawing/2014/main" id="{07835F24-6CBD-4A2D-9BBD-DC890A26924F}"/>
+              </a:ext>
+            </a:extLst>
+          </p:cNvPr>
+          <p:cNvSpPr>
+            <a:spLocks xmlns:a="http://schemas.openxmlformats.org/drawingml/2006/main" noGrp="1"/>
+          </p:cNvSpPr>
+          <p:nvPr/>
+        </p:nvSpPr>
+        <p:spPr>
+          <a:xfrm xmlns:a="http://schemas.openxmlformats.org/drawingml/2006/main">
+            <a:off x="1714500" y="4695825"/>
+            <a:ext cx="9334500" cy="9525"/>
+          </a:xfrm>
+          <a:prstGeom xmlns:a="http://schemas.openxmlformats.org/drawingml/2006/main" prst="rect">
             <a:avLst/>
           </a:prstGeom>
           <a:solidFill xmlns:a="http://schemas.openxmlformats.org/drawingml/2006/main">
-            <a:srgbClr val="2C6E73"/>
+            <a:srgbClr val="D9E0E6"/>
           </a:solidFill>
           <a:ln xmlns:a="http://schemas.openxmlformats.org/drawingml/2006/main" w="0">
-            <a:noFill/>
+            <a:solidFill>
+              <a:srgbClr val="D9E0E6"/>
+            </a:solidFill>
           </a:ln>
         </p:spPr>
       </p:sp>
@@ -8729,19 +8737,19 @@
           <p:cNvPr id="21" name="">
             <a:extLst xmlns:a="http://schemas.openxmlformats.org/drawingml/2006/main">
               <a:ext uri="{FF2B5EF4-FFF2-40B4-BE49-F238E27FC236}">
-                <a16:creationId xmlns:a16="http://schemas.microsoft.com/office/drawing/2014/main" id="{2374499F-9127-4113-8B9F-36E29B98C9A1}"/>
-              </a:ext>
-            </a:extLst>
-          </p:cNvPr>
-          <p:cNvSpPr>
-            <a:spLocks xmlns:a="http://schemas.openxmlformats.org/drawingml/2006/main" noGrp="1"/>
-          </p:cNvSpPr>
-          <p:nvPr/>
-        </p:nvSpPr>
-        <p:spPr>
-          <a:xfrm xmlns:a="http://schemas.openxmlformats.org/drawingml/2006/main">
-            <a:off x="1000125" y="4505325"/>
-            <a:ext cx="476250" cy="419100"/>
+                <a16:creationId xmlns:a16="http://schemas.microsoft.com/office/drawing/2014/main" id="{175682C4-2417-4DE1-A048-55942B74C4CB}"/>
+              </a:ext>
+            </a:extLst>
+          </p:cNvPr>
+          <p:cNvSpPr>
+            <a:spLocks xmlns:a="http://schemas.openxmlformats.org/drawingml/2006/main" noGrp="1"/>
+          </p:cNvSpPr>
+          <p:nvPr/>
+        </p:nvSpPr>
+        <p:spPr>
+          <a:xfrm xmlns:a="http://schemas.openxmlformats.org/drawingml/2006/main">
+            <a:off x="1162050" y="4829175"/>
+            <a:ext cx="400050" cy="400050"/>
           </a:xfrm>
           <a:prstGeom xmlns:a="http://schemas.openxmlformats.org/drawingml/2006/main" prst="rect">
             <a:avLst/>
@@ -8758,9 +8766,9 @@
           <a:lstStyle xmlns:a="http://schemas.openxmlformats.org/drawingml/2006/main"/>
           <a:p xmlns:a="http://schemas.openxmlformats.org/drawingml/2006/main">
             <a:pPr algn="ctr">
-              <a:defRPr sz="1350" b="1">
-                <a:solidFill>
-                  <a:srgbClr val="FFFFFF"/>
+              <a:defRPr sz="1125" b="1">
+                <a:solidFill>
+                  <a:srgbClr val="2F785D"/>
                 </a:solidFill>
                 <a:latin typeface="Arial"/>
                 <a:ea typeface="Arial"/>
@@ -8768,9 +8776,9 @@
               </a:defRPr>
             </a:pPr>
             <a:r>
-              <a:rPr sz="1350" b="1">
-                <a:solidFill>
-                  <a:srgbClr val="FFFFFF"/>
+              <a:rPr sz="1125" b="1">
+                <a:solidFill>
+                  <a:srgbClr val="2F785D"/>
                 </a:solidFill>
                 <a:latin typeface="Arial"/>
                 <a:ea typeface="Arial"/>
@@ -8786,19 +8794,19 @@
           <p:cNvPr id="22" name="">
             <a:extLst xmlns:a="http://schemas.openxmlformats.org/drawingml/2006/main">
               <a:ext uri="{FF2B5EF4-FFF2-40B4-BE49-F238E27FC236}">
-                <a16:creationId xmlns:a16="http://schemas.microsoft.com/office/drawing/2014/main" id="{F48DF87D-C278-4AAA-A20E-2D6D2561F6F4}"/>
-              </a:ext>
-            </a:extLst>
-          </p:cNvPr>
-          <p:cNvSpPr>
-            <a:spLocks xmlns:a="http://schemas.openxmlformats.org/drawingml/2006/main" noGrp="1"/>
-          </p:cNvSpPr>
-          <p:nvPr/>
-        </p:nvSpPr>
-        <p:spPr>
-          <a:xfrm xmlns:a="http://schemas.openxmlformats.org/drawingml/2006/main">
-            <a:off x="1714500" y="4410075"/>
-            <a:ext cx="9429750" cy="609600"/>
+                <a16:creationId xmlns:a16="http://schemas.microsoft.com/office/drawing/2014/main" id="{335A1975-0039-4EBC-8AC2-DA516F3DDCEB}"/>
+              </a:ext>
+            </a:extLst>
+          </p:cNvPr>
+          <p:cNvSpPr>
+            <a:spLocks xmlns:a="http://schemas.openxmlformats.org/drawingml/2006/main" noGrp="1"/>
+          </p:cNvSpPr>
+          <p:nvPr/>
+        </p:nvSpPr>
+        <p:spPr>
+          <a:xfrm xmlns:a="http://schemas.openxmlformats.org/drawingml/2006/main">
+            <a:off x="1714500" y="4743450"/>
+            <a:ext cx="9525000" cy="809625"/>
           </a:xfrm>
           <a:prstGeom xmlns:a="http://schemas.openxmlformats.org/drawingml/2006/main" prst="rect">
             <a:avLst/>
@@ -8815,7 +8823,7 @@
           <a:lstStyle xmlns:a="http://schemas.openxmlformats.org/drawingml/2006/main"/>
           <a:p xmlns:a="http://schemas.openxmlformats.org/drawingml/2006/main">
             <a:pPr algn="l">
-              <a:defRPr sz="1500" b="1">
+              <a:defRPr sz="1725" b="1">
                 <a:solidFill>
                   <a:srgbClr val="2F785D"/>
                 </a:solidFill>
@@ -8825,7 +8833,7 @@
               </a:defRPr>
             </a:pPr>
             <a:r>
-              <a:rPr sz="1500" b="1">
+              <a:rPr sz="1725" b="1">
                 <a:solidFill>
                   <a:srgbClr val="2F785D"/>
                 </a:solidFill>
@@ -8833,7 +8841,7 @@
                 <a:ea typeface="Arial"/>
                 <a:cs typeface="Arial"/>
               </a:rPr>
-              <a:t>Check the result: Check side lengths and orientation after the transformation.</a:t>
+              <a:t>Start point = (-2, -1)</a:t>
             </a:r>
           </a:p>
         </p:txBody>
@@ -8841,7 +8849,7 @@
     </p:spTree>
     <p:extLst>
       <p:ext uri="{BB962C8B-B14F-4D97-AF65-F5344CB8AC3E}">
-        <p14:creationId xmlns:p14="http://schemas.microsoft.com/office/powerpoint/2010/main" val="625436338"/>
+        <p14:creationId xmlns:p14="http://schemas.microsoft.com/office/powerpoint/2010/main" val="1801592447"/>
       </p:ext>
     </p:extLst>
   </p:cSld>
@@ -9134,7 +9142,7 @@
           <p:cNvPr id="15" name="">
             <a:extLst xmlns:a="http://schemas.openxmlformats.org/drawingml/2006/main">
               <a:ext uri="{FF2B5EF4-FFF2-40B4-BE49-F238E27FC236}">
-                <a16:creationId xmlns:a16="http://schemas.microsoft.com/office/drawing/2014/main" id="{5CD1D55A-8F60-4776-8F1D-0302C9595451}"/>
+                <a16:creationId xmlns:a16="http://schemas.microsoft.com/office/drawing/2014/main" id="{4277DEAE-B257-473B-8FA9-15FAEAF379F2}"/>
               </a:ext>
             </a:extLst>
           </p:cNvPr>
@@ -9166,7 +9174,7 @@
           <p:cNvPr id="2" name="">
             <a:extLst xmlns:a="http://schemas.openxmlformats.org/drawingml/2006/main">
               <a:ext uri="{FF2B5EF4-FFF2-40B4-BE49-F238E27FC236}">
-                <a16:creationId xmlns:a16="http://schemas.microsoft.com/office/drawing/2014/main" id="{E5E8A9AF-1CC3-4EDE-8A56-BAFBAE5A15EA}"/>
+                <a16:creationId xmlns:a16="http://schemas.microsoft.com/office/drawing/2014/main" id="{373532AE-EA86-4C44-AAB2-0A86E6C86A4A}"/>
               </a:ext>
             </a:extLst>
           </p:cNvPr>
@@ -9223,7 +9231,7 @@
           <p:cNvPr id="3" name="">
             <a:extLst xmlns:a="http://schemas.openxmlformats.org/drawingml/2006/main">
               <a:ext uri="{FF2B5EF4-FFF2-40B4-BE49-F238E27FC236}">
-                <a16:creationId xmlns:a16="http://schemas.microsoft.com/office/drawing/2014/main" id="{F7D7F4FA-20B3-4D99-A001-64FBD54A99AC}"/>
+                <a16:creationId xmlns:a16="http://schemas.microsoft.com/office/drawing/2014/main" id="{4AA5C4A8-7513-4992-8357-CBB02496C12F}"/>
               </a:ext>
             </a:extLst>
           </p:cNvPr>
@@ -9255,7 +9263,7 @@
           <p:cNvPr id="4" name="">
             <a:extLst xmlns:a="http://schemas.openxmlformats.org/drawingml/2006/main">
               <a:ext uri="{FF2B5EF4-FFF2-40B4-BE49-F238E27FC236}">
-                <a16:creationId xmlns:a16="http://schemas.microsoft.com/office/drawing/2014/main" id="{E8F87E81-687D-4A36-BAC3-FECC614AFA87}"/>
+                <a16:creationId xmlns:a16="http://schemas.microsoft.com/office/drawing/2014/main" id="{9B0205C6-6BC8-4DBF-A8FA-7F881664C9F6}"/>
               </a:ext>
             </a:extLst>
           </p:cNvPr>
@@ -9312,7 +9320,7 @@
           <p:cNvPr id="5" name="">
             <a:extLst xmlns:a="http://schemas.openxmlformats.org/drawingml/2006/main">
               <a:ext uri="{FF2B5EF4-FFF2-40B4-BE49-F238E27FC236}">
-                <a16:creationId xmlns:a16="http://schemas.microsoft.com/office/drawing/2014/main" id="{382301AB-FBD6-4C3D-B649-8B1096A67F6D}"/>
+                <a16:creationId xmlns:a16="http://schemas.microsoft.com/office/drawing/2014/main" id="{A6DDD2CB-6DC9-491E-AE0F-8CB7F449DC83}"/>
               </a:ext>
             </a:extLst>
           </p:cNvPr>
@@ -9369,7 +9377,7 @@
           <p:cNvPr id="6" name="">
             <a:extLst xmlns:a="http://schemas.openxmlformats.org/drawingml/2006/main">
               <a:ext uri="{FF2B5EF4-FFF2-40B4-BE49-F238E27FC236}">
-                <a16:creationId xmlns:a16="http://schemas.microsoft.com/office/drawing/2014/main" id="{F115F27B-3D41-41F6-BF57-9AADE0321165}"/>
+                <a16:creationId xmlns:a16="http://schemas.microsoft.com/office/drawing/2014/main" id="{E24E955E-BF4B-43A5-A81C-C24F5AC88B4C}"/>
               </a:ext>
             </a:extLst>
           </p:cNvPr>
@@ -9426,7 +9434,7 @@
           <p:cNvPr id="7" name="">
             <a:extLst xmlns:a="http://schemas.openxmlformats.org/drawingml/2006/main">
               <a:ext uri="{FF2B5EF4-FFF2-40B4-BE49-F238E27FC236}">
-                <a16:creationId xmlns:a16="http://schemas.microsoft.com/office/drawing/2014/main" id="{F4F2A23C-7B74-4BEC-AD86-22EF95748B2E}"/>
+                <a16:creationId xmlns:a16="http://schemas.microsoft.com/office/drawing/2014/main" id="{44F8D5B6-17E1-4EAE-B195-593D6196C5C9}"/>
               </a:ext>
             </a:extLst>
           </p:cNvPr>
@@ -9458,7 +9466,7 @@
           <p:cNvPr id="8" name="">
             <a:extLst xmlns:a="http://schemas.openxmlformats.org/drawingml/2006/main">
               <a:ext uri="{FF2B5EF4-FFF2-40B4-BE49-F238E27FC236}">
-                <a16:creationId xmlns:a16="http://schemas.microsoft.com/office/drawing/2014/main" id="{8A891946-B7DD-423B-8768-E62E86613664}"/>
+                <a16:creationId xmlns:a16="http://schemas.microsoft.com/office/drawing/2014/main" id="{979B015C-44D3-4BF8-89D0-9E96290A16C6}"/>
               </a:ext>
             </a:extLst>
           </p:cNvPr>
@@ -9515,7 +9523,7 @@
           <p:cNvPr id="9" name="">
             <a:extLst xmlns:a="http://schemas.openxmlformats.org/drawingml/2006/main">
               <a:ext uri="{FF2B5EF4-FFF2-40B4-BE49-F238E27FC236}">
-                <a16:creationId xmlns:a16="http://schemas.microsoft.com/office/drawing/2014/main" id="{64CD5CB2-E6F4-4A29-B1C6-07CFA0DDF38D}"/>
+                <a16:creationId xmlns:a16="http://schemas.microsoft.com/office/drawing/2014/main" id="{39F4C5D3-420E-4729-9750-17A25CA1B100}"/>
               </a:ext>
             </a:extLst>
           </p:cNvPr>
@@ -9572,7 +9580,7 @@
           <p:cNvPr id="10" name="">
             <a:extLst xmlns:a="http://schemas.openxmlformats.org/drawingml/2006/main">
               <a:ext uri="{FF2B5EF4-FFF2-40B4-BE49-F238E27FC236}">
-                <a16:creationId xmlns:a16="http://schemas.microsoft.com/office/drawing/2014/main" id="{038E38FB-6A99-45F8-BBAF-2997E3BD056E}"/>
+                <a16:creationId xmlns:a16="http://schemas.microsoft.com/office/drawing/2014/main" id="{B12117EC-300D-439E-9FD0-7FF16B42E4D6}"/>
               </a:ext>
             </a:extLst>
           </p:cNvPr>
@@ -9629,7 +9637,7 @@
           <p:cNvPr id="11" name="">
             <a:extLst xmlns:a="http://schemas.openxmlformats.org/drawingml/2006/main">
               <a:ext uri="{FF2B5EF4-FFF2-40B4-BE49-F238E27FC236}">
-                <a16:creationId xmlns:a16="http://schemas.microsoft.com/office/drawing/2014/main" id="{7D909C2C-EB8A-41EB-A73F-A766D56CB146}"/>
+                <a16:creationId xmlns:a16="http://schemas.microsoft.com/office/drawing/2014/main" id="{7672A38D-1E94-49A6-AFD1-7C993B10BBD7}"/>
               </a:ext>
             </a:extLst>
           </p:cNvPr>
@@ -9686,7 +9694,7 @@
           <p:cNvPr id="12" name="">
             <a:extLst xmlns:a="http://schemas.openxmlformats.org/drawingml/2006/main">
               <a:ext uri="{FF2B5EF4-FFF2-40B4-BE49-F238E27FC236}">
-                <a16:creationId xmlns:a16="http://schemas.microsoft.com/office/drawing/2014/main" id="{71E72D88-1BFF-4E3C-B17A-8063004C0CD6}"/>
+                <a16:creationId xmlns:a16="http://schemas.microsoft.com/office/drawing/2014/main" id="{54954253-D308-4E93-91C9-55F244631DF1}"/>
               </a:ext>
             </a:extLst>
           </p:cNvPr>
@@ -9718,7 +9726,7 @@
           <p:cNvPr id="13" name="">
             <a:extLst xmlns:a="http://schemas.openxmlformats.org/drawingml/2006/main">
               <a:ext uri="{FF2B5EF4-FFF2-40B4-BE49-F238E27FC236}">
-                <a16:creationId xmlns:a16="http://schemas.microsoft.com/office/drawing/2014/main" id="{97B3A1E4-E36D-4203-9A73-F261213B0C3F}"/>
+                <a16:creationId xmlns:a16="http://schemas.microsoft.com/office/drawing/2014/main" id="{A8788194-3B38-4C8F-8239-24C7C7E3ACAC}"/>
               </a:ext>
             </a:extLst>
           </p:cNvPr>
@@ -9775,7 +9783,7 @@
           <p:cNvPr id="14" name="">
             <a:extLst xmlns:a="http://schemas.openxmlformats.org/drawingml/2006/main">
               <a:ext uri="{FF2B5EF4-FFF2-40B4-BE49-F238E27FC236}">
-                <a16:creationId xmlns:a16="http://schemas.microsoft.com/office/drawing/2014/main" id="{954CDAC8-46A1-4921-A7D1-1CD3EABFA682}"/>
+                <a16:creationId xmlns:a16="http://schemas.microsoft.com/office/drawing/2014/main" id="{CFA51BCB-3158-4D3B-B9B9-E56E079C1376}"/>
               </a:ext>
             </a:extLst>
           </p:cNvPr>
@@ -9830,7 +9838,7 @@
     </p:spTree>
     <p:extLst>
       <p:ext uri="{BB962C8B-B14F-4D97-AF65-F5344CB8AC3E}">
-        <p14:creationId xmlns:p14="http://schemas.microsoft.com/office/powerpoint/2010/main" val="1092021676"/>
+        <p14:creationId xmlns:p14="http://schemas.microsoft.com/office/powerpoint/2010/main" val="1485065555"/>
       </p:ext>
     </p:extLst>
   </p:cSld>
@@ -10031,7 +10039,7 @@
           <p:cNvPr id="16" name="">
             <a:extLst xmlns:a="http://schemas.openxmlformats.org/drawingml/2006/main">
               <a:ext uri="{FF2B5EF4-FFF2-40B4-BE49-F238E27FC236}">
-                <a16:creationId xmlns:a16="http://schemas.microsoft.com/office/drawing/2014/main" id="{609BCF43-8C9F-4314-821C-FE659DFFFA8C}"/>
+                <a16:creationId xmlns:a16="http://schemas.microsoft.com/office/drawing/2014/main" id="{AA3C2299-DD7B-4DA3-BB23-7091CD077DE6}"/>
               </a:ext>
             </a:extLst>
           </p:cNvPr>
@@ -10063,7 +10071,7 @@
           <p:cNvPr id="2" name="">
             <a:extLst xmlns:a="http://schemas.openxmlformats.org/drawingml/2006/main">
               <a:ext uri="{FF2B5EF4-FFF2-40B4-BE49-F238E27FC236}">
-                <a16:creationId xmlns:a16="http://schemas.microsoft.com/office/drawing/2014/main" id="{B9834014-8657-4951-973B-5B26605A78EC}"/>
+                <a16:creationId xmlns:a16="http://schemas.microsoft.com/office/drawing/2014/main" id="{FDF7962F-ABE0-4DEE-8448-50FC8341CCF2}"/>
               </a:ext>
             </a:extLst>
           </p:cNvPr>
@@ -10120,7 +10128,7 @@
           <p:cNvPr id="3" name="">
             <a:extLst xmlns:a="http://schemas.openxmlformats.org/drawingml/2006/main">
               <a:ext uri="{FF2B5EF4-FFF2-40B4-BE49-F238E27FC236}">
-                <a16:creationId xmlns:a16="http://schemas.microsoft.com/office/drawing/2014/main" id="{9A2BB5E8-5B75-4490-80C4-3A38C97C3A07}"/>
+                <a16:creationId xmlns:a16="http://schemas.microsoft.com/office/drawing/2014/main" id="{74A79272-4C77-45CF-B314-2369C547BC44}"/>
               </a:ext>
             </a:extLst>
           </p:cNvPr>
@@ -10152,7 +10160,7 @@
           <p:cNvPr id="4" name="">
             <a:extLst xmlns:a="http://schemas.openxmlformats.org/drawingml/2006/main">
               <a:ext uri="{FF2B5EF4-FFF2-40B4-BE49-F238E27FC236}">
-                <a16:creationId xmlns:a16="http://schemas.microsoft.com/office/drawing/2014/main" id="{A903F5BF-2ABD-4B01-AA7D-6A603AC6829F}"/>
+                <a16:creationId xmlns:a16="http://schemas.microsoft.com/office/drawing/2014/main" id="{E1AF5418-FF04-47ED-AD09-66B07D8313DD}"/>
               </a:ext>
             </a:extLst>
           </p:cNvPr>
@@ -10209,7 +10217,7 @@
           <p:cNvPr id="5" name="">
             <a:extLst xmlns:a="http://schemas.openxmlformats.org/drawingml/2006/main">
               <a:ext uri="{FF2B5EF4-FFF2-40B4-BE49-F238E27FC236}">
-                <a16:creationId xmlns:a16="http://schemas.microsoft.com/office/drawing/2014/main" id="{B6A2F9E9-0F57-4BA0-A457-F32742C567EB}"/>
+                <a16:creationId xmlns:a16="http://schemas.microsoft.com/office/drawing/2014/main" id="{6B960E1C-5543-48A7-B6B9-0DD695794AE0}"/>
               </a:ext>
             </a:extLst>
           </p:cNvPr>
@@ -10266,7 +10274,7 @@
           <p:cNvPr id="6" name="">
             <a:extLst xmlns:a="http://schemas.openxmlformats.org/drawingml/2006/main">
               <a:ext uri="{FF2B5EF4-FFF2-40B4-BE49-F238E27FC236}">
-                <a16:creationId xmlns:a16="http://schemas.microsoft.com/office/drawing/2014/main" id="{FA665192-8453-486B-9CD9-DAA05FDCAB53}"/>
+                <a16:creationId xmlns:a16="http://schemas.microsoft.com/office/drawing/2014/main" id="{BC1B6F46-8DC5-44C8-A4BF-A6F5961EFC0A}"/>
               </a:ext>
             </a:extLst>
           </p:cNvPr>
@@ -10323,7 +10331,7 @@
           <p:cNvPr id="7" name="">
             <a:extLst xmlns:a="http://schemas.openxmlformats.org/drawingml/2006/main">
               <a:ext uri="{FF2B5EF4-FFF2-40B4-BE49-F238E27FC236}">
-                <a16:creationId xmlns:a16="http://schemas.microsoft.com/office/drawing/2014/main" id="{704099C4-3121-43CF-86FC-1B6C096361F8}"/>
+                <a16:creationId xmlns:a16="http://schemas.microsoft.com/office/drawing/2014/main" id="{FA692809-C4BF-4ECF-9E46-B19D4D4F3559}"/>
               </a:ext>
             </a:extLst>
           </p:cNvPr>
@@ -10355,7 +10363,7 @@
           <p:cNvPr id="8" name="">
             <a:extLst xmlns:a="http://schemas.openxmlformats.org/drawingml/2006/main">
               <a:ext uri="{FF2B5EF4-FFF2-40B4-BE49-F238E27FC236}">
-                <a16:creationId xmlns:a16="http://schemas.microsoft.com/office/drawing/2014/main" id="{8052EE11-F0EF-4691-9005-AEB044C678D8}"/>
+                <a16:creationId xmlns:a16="http://schemas.microsoft.com/office/drawing/2014/main" id="{E077691A-1CCC-4D8C-926A-404D97F49AC3}"/>
               </a:ext>
             </a:extLst>
           </p:cNvPr>
@@ -10412,7 +10420,7 @@
           <p:cNvPr id="9" name="">
             <a:extLst xmlns:a="http://schemas.openxmlformats.org/drawingml/2006/main">
               <a:ext uri="{FF2B5EF4-FFF2-40B4-BE49-F238E27FC236}">
-                <a16:creationId xmlns:a16="http://schemas.microsoft.com/office/drawing/2014/main" id="{048C42F0-F7AC-4FEE-8A40-65D7A015634C}"/>
+                <a16:creationId xmlns:a16="http://schemas.microsoft.com/office/drawing/2014/main" id="{89A4F50D-718C-4208-B9CA-831277B68EF8}"/>
               </a:ext>
             </a:extLst>
           </p:cNvPr>
@@ -10469,7 +10477,7 @@
           <p:cNvPr id="10" name="">
             <a:extLst xmlns:a="http://schemas.openxmlformats.org/drawingml/2006/main">
               <a:ext uri="{FF2B5EF4-FFF2-40B4-BE49-F238E27FC236}">
-                <a16:creationId xmlns:a16="http://schemas.microsoft.com/office/drawing/2014/main" id="{DE9B1B57-7550-4117-B797-DB19B49B8787}"/>
+                <a16:creationId xmlns:a16="http://schemas.microsoft.com/office/drawing/2014/main" id="{0AF40D00-16BC-4386-95F3-69D156698BEC}"/>
               </a:ext>
             </a:extLst>
           </p:cNvPr>
@@ -10526,7 +10534,7 @@
           <p:cNvPr id="11" name="">
             <a:extLst xmlns:a="http://schemas.openxmlformats.org/drawingml/2006/main">
               <a:ext uri="{FF2B5EF4-FFF2-40B4-BE49-F238E27FC236}">
-                <a16:creationId xmlns:a16="http://schemas.microsoft.com/office/drawing/2014/main" id="{86EC79F0-7BD1-474E-BC7B-1219E250C389}"/>
+                <a16:creationId xmlns:a16="http://schemas.microsoft.com/office/drawing/2014/main" id="{3C9B030F-6E67-49FF-80D0-7EFE4C7D59CA}"/>
               </a:ext>
             </a:extLst>
           </p:cNvPr>
@@ -10583,7 +10591,7 @@
           <p:cNvPr id="12" name="">
             <a:extLst xmlns:a="http://schemas.openxmlformats.org/drawingml/2006/main">
               <a:ext uri="{FF2B5EF4-FFF2-40B4-BE49-F238E27FC236}">
-                <a16:creationId xmlns:a16="http://schemas.microsoft.com/office/drawing/2014/main" id="{A802144C-C00F-44B3-ADAC-A71D8646D6B8}"/>
+                <a16:creationId xmlns:a16="http://schemas.microsoft.com/office/drawing/2014/main" id="{47F98096-DA8D-4CCA-B61E-0A6C4CFAFCAB}"/>
               </a:ext>
             </a:extLst>
           </p:cNvPr>
@@ -10640,7 +10648,7 @@
           <p:cNvPr id="13" name="">
             <a:extLst xmlns:a="http://schemas.openxmlformats.org/drawingml/2006/main">
               <a:ext uri="{FF2B5EF4-FFF2-40B4-BE49-F238E27FC236}">
-                <a16:creationId xmlns:a16="http://schemas.microsoft.com/office/drawing/2014/main" id="{12F98115-A63F-4FD4-80F6-E61D09CF88E3}"/>
+                <a16:creationId xmlns:a16="http://schemas.microsoft.com/office/drawing/2014/main" id="{5410635D-7F00-4199-97FE-D911FC304D74}"/>
               </a:ext>
             </a:extLst>
           </p:cNvPr>
@@ -10697,7 +10705,7 @@
           <p:cNvPr id="14" name="">
             <a:extLst xmlns:a="http://schemas.openxmlformats.org/drawingml/2006/main">
               <a:ext uri="{FF2B5EF4-FFF2-40B4-BE49-F238E27FC236}">
-                <a16:creationId xmlns:a16="http://schemas.microsoft.com/office/drawing/2014/main" id="{BA79E0E8-C900-4DA9-8279-203CC1159BB7}"/>
+                <a16:creationId xmlns:a16="http://schemas.microsoft.com/office/drawing/2014/main" id="{BD497910-6566-472A-B883-68F02E487202}"/>
               </a:ext>
             </a:extLst>
           </p:cNvPr>
@@ -10754,7 +10762,7 @@
           <p:cNvPr id="15" name="">
             <a:extLst xmlns:a="http://schemas.openxmlformats.org/drawingml/2006/main">
               <a:ext uri="{FF2B5EF4-FFF2-40B4-BE49-F238E27FC236}">
-                <a16:creationId xmlns:a16="http://schemas.microsoft.com/office/drawing/2014/main" id="{35822341-8BC0-4A29-92FC-56323C476C7E}"/>
+                <a16:creationId xmlns:a16="http://schemas.microsoft.com/office/drawing/2014/main" id="{237D4A68-98E7-433A-934A-FAF930F2BBBF}"/>
               </a:ext>
             </a:extLst>
           </p:cNvPr>
@@ -10809,7 +10817,7 @@
     </p:spTree>
     <p:extLst>
       <p:ext uri="{BB962C8B-B14F-4D97-AF65-F5344CB8AC3E}">
-        <p14:creationId xmlns:p14="http://schemas.microsoft.com/office/powerpoint/2010/main" val="1934882861"/>
+        <p14:creationId xmlns:p14="http://schemas.microsoft.com/office/powerpoint/2010/main" val="1913162882"/>
       </p:ext>
     </p:extLst>
   </p:cSld>
@@ -10964,7 +10972,7 @@
           <p:cNvPr id="16" name="">
             <a:extLst xmlns:a="http://schemas.openxmlformats.org/drawingml/2006/main">
               <a:ext uri="{FF2B5EF4-FFF2-40B4-BE49-F238E27FC236}">
-                <a16:creationId xmlns:a16="http://schemas.microsoft.com/office/drawing/2014/main" id="{C1C998BA-B9A0-4553-9976-A3D6BA5EADCE}"/>
+                <a16:creationId xmlns:a16="http://schemas.microsoft.com/office/drawing/2014/main" id="{D8AC99BA-9406-4093-9C47-2EB35CD669EC}"/>
               </a:ext>
             </a:extLst>
           </p:cNvPr>
@@ -10996,7 +11004,7 @@
           <p:cNvPr id="2" name="">
             <a:extLst xmlns:a="http://schemas.openxmlformats.org/drawingml/2006/main">
               <a:ext uri="{FF2B5EF4-FFF2-40B4-BE49-F238E27FC236}">
-                <a16:creationId xmlns:a16="http://schemas.microsoft.com/office/drawing/2014/main" id="{9CC6222B-E0AC-4759-B064-105B930C9783}"/>
+                <a16:creationId xmlns:a16="http://schemas.microsoft.com/office/drawing/2014/main" id="{33EE8894-1DC1-4B26-B5FA-21D1AF3D2897}"/>
               </a:ext>
             </a:extLst>
           </p:cNvPr>
@@ -11053,7 +11061,7 @@
           <p:cNvPr id="3" name="">
             <a:extLst xmlns:a="http://schemas.openxmlformats.org/drawingml/2006/main">
               <a:ext uri="{FF2B5EF4-FFF2-40B4-BE49-F238E27FC236}">
-                <a16:creationId xmlns:a16="http://schemas.microsoft.com/office/drawing/2014/main" id="{D231CD1E-3B05-4459-91FB-8A5CCC425B20}"/>
+                <a16:creationId xmlns:a16="http://schemas.microsoft.com/office/drawing/2014/main" id="{883C2161-98DF-4242-A53D-424A4837FEAB}"/>
               </a:ext>
             </a:extLst>
           </p:cNvPr>
@@ -11085,7 +11093,7 @@
           <p:cNvPr id="4" name="">
             <a:extLst xmlns:a="http://schemas.openxmlformats.org/drawingml/2006/main">
               <a:ext uri="{FF2B5EF4-FFF2-40B4-BE49-F238E27FC236}">
-                <a16:creationId xmlns:a16="http://schemas.microsoft.com/office/drawing/2014/main" id="{87A6C7E0-231C-4CB8-9557-2DB5F714A942}"/>
+                <a16:creationId xmlns:a16="http://schemas.microsoft.com/office/drawing/2014/main" id="{1B5F4A36-1EC5-4AAB-B63B-463E5892C16E}"/>
               </a:ext>
             </a:extLst>
           </p:cNvPr>
@@ -11142,7 +11150,7 @@
           <p:cNvPr id="5" name="">
             <a:extLst xmlns:a="http://schemas.openxmlformats.org/drawingml/2006/main">
               <a:ext uri="{FF2B5EF4-FFF2-40B4-BE49-F238E27FC236}">
-                <a16:creationId xmlns:a16="http://schemas.microsoft.com/office/drawing/2014/main" id="{17CA592F-596F-495C-9D7B-E5A2B282B753}"/>
+                <a16:creationId xmlns:a16="http://schemas.microsoft.com/office/drawing/2014/main" id="{E39B5335-982E-458D-A7B6-64F91C59B389}"/>
               </a:ext>
             </a:extLst>
           </p:cNvPr>
@@ -11199,7 +11207,7 @@
           <p:cNvPr id="6" name="">
             <a:extLst xmlns:a="http://schemas.openxmlformats.org/drawingml/2006/main">
               <a:ext uri="{FF2B5EF4-FFF2-40B4-BE49-F238E27FC236}">
-                <a16:creationId xmlns:a16="http://schemas.microsoft.com/office/drawing/2014/main" id="{8DB8EAB2-353F-4165-8A3A-4D3A13037366}"/>
+                <a16:creationId xmlns:a16="http://schemas.microsoft.com/office/drawing/2014/main" id="{A6D01213-6201-402E-83E2-3DA46122F547}"/>
               </a:ext>
             </a:extLst>
           </p:cNvPr>
@@ -11256,7 +11264,7 @@
           <p:cNvPr id="7" name="">
             <a:extLst xmlns:a="http://schemas.openxmlformats.org/drawingml/2006/main">
               <a:ext uri="{FF2B5EF4-FFF2-40B4-BE49-F238E27FC236}">
-                <a16:creationId xmlns:a16="http://schemas.microsoft.com/office/drawing/2014/main" id="{6BF91EE6-411E-4671-9216-2BD39C909C2F}"/>
+                <a16:creationId xmlns:a16="http://schemas.microsoft.com/office/drawing/2014/main" id="{CE4A871B-0095-4A93-97B5-A62A6CDC75E9}"/>
               </a:ext>
             </a:extLst>
           </p:cNvPr>
@@ -11288,7 +11296,7 @@
           <p:cNvPr id="8" name="">
             <a:extLst xmlns:a="http://schemas.openxmlformats.org/drawingml/2006/main">
               <a:ext uri="{FF2B5EF4-FFF2-40B4-BE49-F238E27FC236}">
-                <a16:creationId xmlns:a16="http://schemas.microsoft.com/office/drawing/2014/main" id="{4F77E931-6A1C-4063-90BF-6EEF8C131559}"/>
+                <a16:creationId xmlns:a16="http://schemas.microsoft.com/office/drawing/2014/main" id="{E684A92E-D4FA-4743-BBF1-17ECC42D73DA}"/>
               </a:ext>
             </a:extLst>
           </p:cNvPr>
@@ -11345,7 +11353,7 @@
           <p:cNvPr id="9" name="">
             <a:extLst xmlns:a="http://schemas.openxmlformats.org/drawingml/2006/main">
               <a:ext uri="{FF2B5EF4-FFF2-40B4-BE49-F238E27FC236}">
-                <a16:creationId xmlns:a16="http://schemas.microsoft.com/office/drawing/2014/main" id="{E844AD92-AFA4-4D65-A3D3-0B9EF8032C8D}"/>
+                <a16:creationId xmlns:a16="http://schemas.microsoft.com/office/drawing/2014/main" id="{318870DA-10E6-4C81-84D7-B68EA493EE4D}"/>
               </a:ext>
             </a:extLst>
           </p:cNvPr>
@@ -11406,7 +11414,7 @@
           <p:nvPr/>
         </p:nvPicPr>
         <p:blipFill>
-          <a:blip xmlns:r="http://schemas.openxmlformats.org/officeDocument/2006/relationships" xmlns:a="http://schemas.openxmlformats.org/drawingml/2006/main" r:embed="R9c8d604d705643b6"/>
+          <a:blip xmlns:r="http://schemas.openxmlformats.org/officeDocument/2006/relationships" xmlns:a="http://schemas.openxmlformats.org/drawingml/2006/main" r:embed="R25e2223436474b9f"/>
           <a:stretch xmlns:a="http://schemas.openxmlformats.org/drawingml/2006/main"/>
         </p:blipFill>
         <p:spPr>
@@ -11424,7 +11432,7 @@
           <p:cNvPr id="11" name="">
             <a:extLst xmlns:a="http://schemas.openxmlformats.org/drawingml/2006/main">
               <a:ext uri="{FF2B5EF4-FFF2-40B4-BE49-F238E27FC236}">
-                <a16:creationId xmlns:a16="http://schemas.microsoft.com/office/drawing/2014/main" id="{6B4C7C3A-EBE1-4A39-BACF-8F442FC83D74}"/>
+                <a16:creationId xmlns:a16="http://schemas.microsoft.com/office/drawing/2014/main" id="{A453936C-8044-4E75-A1B7-4503233EF86B}"/>
               </a:ext>
             </a:extLst>
           </p:cNvPr>
@@ -11481,7 +11489,7 @@
           <p:cNvPr id="12" name="">
             <a:extLst xmlns:a="http://schemas.openxmlformats.org/drawingml/2006/main">
               <a:ext uri="{FF2B5EF4-FFF2-40B4-BE49-F238E27FC236}">
-                <a16:creationId xmlns:a16="http://schemas.microsoft.com/office/drawing/2014/main" id="{F6C841B5-0DB8-4840-906C-493DA03C9A0F}"/>
+                <a16:creationId xmlns:a16="http://schemas.microsoft.com/office/drawing/2014/main" id="{E043A2A2-B8D0-4023-BEE3-8DF822C35171}"/>
               </a:ext>
             </a:extLst>
           </p:cNvPr>
@@ -11538,7 +11546,7 @@
           <p:cNvPr id="13" name="">
             <a:extLst xmlns:a="http://schemas.openxmlformats.org/drawingml/2006/main">
               <a:ext uri="{FF2B5EF4-FFF2-40B4-BE49-F238E27FC236}">
-                <a16:creationId xmlns:a16="http://schemas.microsoft.com/office/drawing/2014/main" id="{2E9826F8-9B4C-4A20-BE4E-7340BCA356DD}"/>
+                <a16:creationId xmlns:a16="http://schemas.microsoft.com/office/drawing/2014/main" id="{30610DCD-3E6F-4754-9145-4CF482B72C56}"/>
               </a:ext>
             </a:extLst>
           </p:cNvPr>
@@ -11570,7 +11578,7 @@
           <p:cNvPr id="14" name="">
             <a:extLst xmlns:a="http://schemas.openxmlformats.org/drawingml/2006/main">
               <a:ext uri="{FF2B5EF4-FFF2-40B4-BE49-F238E27FC236}">
-                <a16:creationId xmlns:a16="http://schemas.microsoft.com/office/drawing/2014/main" id="{F05AEDFC-BFE6-464E-BC06-B12461671C53}"/>
+                <a16:creationId xmlns:a16="http://schemas.microsoft.com/office/drawing/2014/main" id="{07E86483-5EB3-4C94-A058-E3B8CBD09E80}"/>
               </a:ext>
             </a:extLst>
           </p:cNvPr>
@@ -11627,7 +11635,7 @@
           <p:cNvPr id="15" name="">
             <a:extLst xmlns:a="http://schemas.openxmlformats.org/drawingml/2006/main">
               <a:ext uri="{FF2B5EF4-FFF2-40B4-BE49-F238E27FC236}">
-                <a16:creationId xmlns:a16="http://schemas.microsoft.com/office/drawing/2014/main" id="{61750E3D-59FF-47FB-A52F-6E7608CA6FEB}"/>
+                <a16:creationId xmlns:a16="http://schemas.microsoft.com/office/drawing/2014/main" id="{1E517EAC-82FA-4EE6-AECE-1373F9DF1E10}"/>
               </a:ext>
             </a:extLst>
           </p:cNvPr>
@@ -11682,7 +11690,7 @@
     </p:spTree>
     <p:extLst>
       <p:ext uri="{BB962C8B-B14F-4D97-AF65-F5344CB8AC3E}">
-        <p14:creationId xmlns:p14="http://schemas.microsoft.com/office/powerpoint/2010/main" val="753413437"/>
+        <p14:creationId xmlns:p14="http://schemas.microsoft.com/office/powerpoint/2010/main" val="770377486"/>
       </p:ext>
     </p:extLst>
   </p:cSld>
@@ -11837,7 +11845,7 @@
           <p:cNvPr id="23" name="">
             <a:extLst xmlns:a="http://schemas.openxmlformats.org/drawingml/2006/main">
               <a:ext uri="{FF2B5EF4-FFF2-40B4-BE49-F238E27FC236}">
-                <a16:creationId xmlns:a16="http://schemas.microsoft.com/office/drawing/2014/main" id="{37C596EE-4941-4E8A-B693-E6AF104070E6}"/>
+                <a16:creationId xmlns:a16="http://schemas.microsoft.com/office/drawing/2014/main" id="{412AF2F5-FB87-45FC-8067-440DF4925167}"/>
               </a:ext>
             </a:extLst>
           </p:cNvPr>
@@ -11869,7 +11877,7 @@
           <p:cNvPr id="2" name="">
             <a:extLst xmlns:a="http://schemas.openxmlformats.org/drawingml/2006/main">
               <a:ext uri="{FF2B5EF4-FFF2-40B4-BE49-F238E27FC236}">
-                <a16:creationId xmlns:a16="http://schemas.microsoft.com/office/drawing/2014/main" id="{9AEE165C-86EA-454C-8459-D13886A2127B}"/>
+                <a16:creationId xmlns:a16="http://schemas.microsoft.com/office/drawing/2014/main" id="{555D332E-58AB-443B-95D2-BEE260A6BAB2}"/>
               </a:ext>
             </a:extLst>
           </p:cNvPr>
@@ -11926,7 +11934,7 @@
           <p:cNvPr id="3" name="">
             <a:extLst xmlns:a="http://schemas.openxmlformats.org/drawingml/2006/main">
               <a:ext uri="{FF2B5EF4-FFF2-40B4-BE49-F238E27FC236}">
-                <a16:creationId xmlns:a16="http://schemas.microsoft.com/office/drawing/2014/main" id="{9B63E54B-CECD-44C5-944F-2584AF7E0D80}"/>
+                <a16:creationId xmlns:a16="http://schemas.microsoft.com/office/drawing/2014/main" id="{3EE65105-EC2C-4089-A1D3-2E3C1DD8F003}"/>
               </a:ext>
             </a:extLst>
           </p:cNvPr>
@@ -11958,7 +11966,7 @@
           <p:cNvPr id="4" name="">
             <a:extLst xmlns:a="http://schemas.openxmlformats.org/drawingml/2006/main">
               <a:ext uri="{FF2B5EF4-FFF2-40B4-BE49-F238E27FC236}">
-                <a16:creationId xmlns:a16="http://schemas.microsoft.com/office/drawing/2014/main" id="{559F3F4B-073A-473C-9C83-ACDEDCE146DF}"/>
+                <a16:creationId xmlns:a16="http://schemas.microsoft.com/office/drawing/2014/main" id="{A4423163-27D7-4BAE-B436-F4D421EC26A0}"/>
               </a:ext>
             </a:extLst>
           </p:cNvPr>
@@ -12015,7 +12023,7 @@
           <p:cNvPr id="5" name="">
             <a:extLst xmlns:a="http://schemas.openxmlformats.org/drawingml/2006/main">
               <a:ext uri="{FF2B5EF4-FFF2-40B4-BE49-F238E27FC236}">
-                <a16:creationId xmlns:a16="http://schemas.microsoft.com/office/drawing/2014/main" id="{5DA7BE54-6809-4E01-94FB-BCFDC8089C5C}"/>
+                <a16:creationId xmlns:a16="http://schemas.microsoft.com/office/drawing/2014/main" id="{45011B41-620B-418D-99FA-EA5CA0757943}"/>
               </a:ext>
             </a:extLst>
           </p:cNvPr>
@@ -12072,7 +12080,7 @@
           <p:cNvPr id="6" name="">
             <a:extLst xmlns:a="http://schemas.openxmlformats.org/drawingml/2006/main">
               <a:ext uri="{FF2B5EF4-FFF2-40B4-BE49-F238E27FC236}">
-                <a16:creationId xmlns:a16="http://schemas.microsoft.com/office/drawing/2014/main" id="{D81FD283-8550-4606-B393-101ED3C5CFA6}"/>
+                <a16:creationId xmlns:a16="http://schemas.microsoft.com/office/drawing/2014/main" id="{57D96C57-DFD2-4687-8DDD-F5DF7D4266C0}"/>
               </a:ext>
             </a:extLst>
           </p:cNvPr>
@@ -12129,7 +12137,7 @@
           <p:cNvPr id="7" name="">
             <a:extLst xmlns:a="http://schemas.openxmlformats.org/drawingml/2006/main">
               <a:ext uri="{FF2B5EF4-FFF2-40B4-BE49-F238E27FC236}">
-                <a16:creationId xmlns:a16="http://schemas.microsoft.com/office/drawing/2014/main" id="{E406E589-DB3F-4CF3-BB37-792E63756CD2}"/>
+                <a16:creationId xmlns:a16="http://schemas.microsoft.com/office/drawing/2014/main" id="{85D0C3B0-C539-4471-B771-A9ED2D8645FD}"/>
               </a:ext>
             </a:extLst>
           </p:cNvPr>
@@ -12161,7 +12169,7 @@
           <p:cNvPr id="8" name="">
             <a:extLst xmlns:a="http://schemas.openxmlformats.org/drawingml/2006/main">
               <a:ext uri="{FF2B5EF4-FFF2-40B4-BE49-F238E27FC236}">
-                <a16:creationId xmlns:a16="http://schemas.microsoft.com/office/drawing/2014/main" id="{9779F07F-8A86-4A08-84E6-CB035698073B}"/>
+                <a16:creationId xmlns:a16="http://schemas.microsoft.com/office/drawing/2014/main" id="{269A12C2-DF4C-4555-B9DD-3E809B1116EB}"/>
               </a:ext>
             </a:extLst>
           </p:cNvPr>
@@ -12218,7 +12226,7 @@
           <p:cNvPr id="9" name="">
             <a:extLst xmlns:a="http://schemas.openxmlformats.org/drawingml/2006/main">
               <a:ext uri="{FF2B5EF4-FFF2-40B4-BE49-F238E27FC236}">
-                <a16:creationId xmlns:a16="http://schemas.microsoft.com/office/drawing/2014/main" id="{F96829D0-AB76-4EB8-AA88-F41F488E8652}"/>
+                <a16:creationId xmlns:a16="http://schemas.microsoft.com/office/drawing/2014/main" id="{3A80D5CC-D0CC-45EF-AEE6-AAB6126765C3}"/>
               </a:ext>
             </a:extLst>
           </p:cNvPr>
@@ -12275,7 +12283,7 @@
           <p:cNvPr id="10" name="">
             <a:extLst xmlns:a="http://schemas.openxmlformats.org/drawingml/2006/main">
               <a:ext uri="{FF2B5EF4-FFF2-40B4-BE49-F238E27FC236}">
-                <a16:creationId xmlns:a16="http://schemas.microsoft.com/office/drawing/2014/main" id="{27B14156-C247-45A4-96E2-74B24AB5752B}"/>
+                <a16:creationId xmlns:a16="http://schemas.microsoft.com/office/drawing/2014/main" id="{1EB1CF55-0972-4C64-BA3A-2185F0BA608A}"/>
               </a:ext>
             </a:extLst>
           </p:cNvPr>
@@ -12309,7 +12317,7 @@
           <p:cNvPr id="11" name="">
             <a:extLst xmlns:a="http://schemas.openxmlformats.org/drawingml/2006/main">
               <a:ext uri="{FF2B5EF4-FFF2-40B4-BE49-F238E27FC236}">
-                <a16:creationId xmlns:a16="http://schemas.microsoft.com/office/drawing/2014/main" id="{062CB0C8-8303-4C4F-BCF7-6DA703E6BF0B}"/>
+                <a16:creationId xmlns:a16="http://schemas.microsoft.com/office/drawing/2014/main" id="{ACCB1846-ED9F-4717-9EC8-589082543727}"/>
               </a:ext>
             </a:extLst>
           </p:cNvPr>
@@ -12341,7 +12349,7 @@
           <p:cNvPr id="12" name="">
             <a:extLst xmlns:a="http://schemas.openxmlformats.org/drawingml/2006/main">
               <a:ext uri="{FF2B5EF4-FFF2-40B4-BE49-F238E27FC236}">
-                <a16:creationId xmlns:a16="http://schemas.microsoft.com/office/drawing/2014/main" id="{80DC64A1-A225-4B51-9776-44F11DC033FC}"/>
+                <a16:creationId xmlns:a16="http://schemas.microsoft.com/office/drawing/2014/main" id="{CB10A4C9-913E-4BC3-BB10-7541C8DEF8F8}"/>
               </a:ext>
             </a:extLst>
           </p:cNvPr>
@@ -12398,7 +12406,7 @@
           <p:cNvPr id="13" name="">
             <a:extLst xmlns:a="http://schemas.openxmlformats.org/drawingml/2006/main">
               <a:ext uri="{FF2B5EF4-FFF2-40B4-BE49-F238E27FC236}">
-                <a16:creationId xmlns:a16="http://schemas.microsoft.com/office/drawing/2014/main" id="{84AE29F2-BB54-49DF-BE00-CD6260B4035E}"/>
+                <a16:creationId xmlns:a16="http://schemas.microsoft.com/office/drawing/2014/main" id="{BA5C5D9B-4023-49E4-BA39-6A023382A1AE}"/>
               </a:ext>
             </a:extLst>
           </p:cNvPr>
@@ -12455,7 +12463,7 @@
           <p:cNvPr id="14" name="">
             <a:extLst xmlns:a="http://schemas.openxmlformats.org/drawingml/2006/main">
               <a:ext uri="{FF2B5EF4-FFF2-40B4-BE49-F238E27FC236}">
-                <a16:creationId xmlns:a16="http://schemas.microsoft.com/office/drawing/2014/main" id="{E82F1BBB-A9DF-4F91-ACFE-36481FA3C5EC}"/>
+                <a16:creationId xmlns:a16="http://schemas.microsoft.com/office/drawing/2014/main" id="{23D483CA-37E6-4B68-BA43-C3F135346B42}"/>
               </a:ext>
             </a:extLst>
           </p:cNvPr>
@@ -12489,7 +12497,7 @@
           <p:cNvPr id="15" name="">
             <a:extLst xmlns:a="http://schemas.openxmlformats.org/drawingml/2006/main">
               <a:ext uri="{FF2B5EF4-FFF2-40B4-BE49-F238E27FC236}">
-                <a16:creationId xmlns:a16="http://schemas.microsoft.com/office/drawing/2014/main" id="{0281BF7D-07C7-4847-95FC-FE65ED1BB93F}"/>
+                <a16:creationId xmlns:a16="http://schemas.microsoft.com/office/drawing/2014/main" id="{66A7CE54-48D5-4075-AD69-C850FD96C09F}"/>
               </a:ext>
             </a:extLst>
           </p:cNvPr>
@@ -12521,7 +12529,7 @@
           <p:cNvPr id="16" name="">
             <a:extLst xmlns:a="http://schemas.openxmlformats.org/drawingml/2006/main">
               <a:ext uri="{FF2B5EF4-FFF2-40B4-BE49-F238E27FC236}">
-                <a16:creationId xmlns:a16="http://schemas.microsoft.com/office/drawing/2014/main" id="{7FC1271D-38B3-4B88-99D6-0298CB11624D}"/>
+                <a16:creationId xmlns:a16="http://schemas.microsoft.com/office/drawing/2014/main" id="{3FF7E6DB-CA72-4BA9-8D8D-DC34FB6AD2ED}"/>
               </a:ext>
             </a:extLst>
           </p:cNvPr>
@@ -12578,7 +12586,7 @@
           <p:cNvPr id="17" name="">
             <a:extLst xmlns:a="http://schemas.openxmlformats.org/drawingml/2006/main">
               <a:ext uri="{FF2B5EF4-FFF2-40B4-BE49-F238E27FC236}">
-                <a16:creationId xmlns:a16="http://schemas.microsoft.com/office/drawing/2014/main" id="{A43AAFC3-4C7C-4012-B085-5E026301D787}"/>
+                <a16:creationId xmlns:a16="http://schemas.microsoft.com/office/drawing/2014/main" id="{D75D3DCA-B1E8-4D3C-91B2-6026A3E6CE34}"/>
               </a:ext>
             </a:extLst>
           </p:cNvPr>
@@ -12635,7 +12643,7 @@
           <p:cNvPr id="18" name="">
             <a:extLst xmlns:a="http://schemas.openxmlformats.org/drawingml/2006/main">
               <a:ext uri="{FF2B5EF4-FFF2-40B4-BE49-F238E27FC236}">
-                <a16:creationId xmlns:a16="http://schemas.microsoft.com/office/drawing/2014/main" id="{02A152CE-AAB2-4A22-A75D-0C992299A377}"/>
+                <a16:creationId xmlns:a16="http://schemas.microsoft.com/office/drawing/2014/main" id="{C047E0A3-F281-4318-A5D7-4E447191AA26}"/>
               </a:ext>
             </a:extLst>
           </p:cNvPr>
@@ -12669,7 +12677,7 @@
           <p:cNvPr id="19" name="">
             <a:extLst xmlns:a="http://schemas.openxmlformats.org/drawingml/2006/main">
               <a:ext uri="{FF2B5EF4-FFF2-40B4-BE49-F238E27FC236}">
-                <a16:creationId xmlns:a16="http://schemas.microsoft.com/office/drawing/2014/main" id="{EC5CECF8-CDB6-4410-B51A-6592FF2E21BF}"/>
+                <a16:creationId xmlns:a16="http://schemas.microsoft.com/office/drawing/2014/main" id="{DB518277-36D2-44F0-BD66-E23D9892EF5F}"/>
               </a:ext>
             </a:extLst>
           </p:cNvPr>
@@ -12701,7 +12709,7 @@
           <p:cNvPr id="20" name="">
             <a:extLst xmlns:a="http://schemas.openxmlformats.org/drawingml/2006/main">
               <a:ext uri="{FF2B5EF4-FFF2-40B4-BE49-F238E27FC236}">
-                <a16:creationId xmlns:a16="http://schemas.microsoft.com/office/drawing/2014/main" id="{4BA1BCAD-3F0E-410F-A457-C9D4B5997ED4}"/>
+                <a16:creationId xmlns:a16="http://schemas.microsoft.com/office/drawing/2014/main" id="{50905786-089B-43B6-B21E-52E85DDEDE23}"/>
               </a:ext>
             </a:extLst>
           </p:cNvPr>
@@ -12758,7 +12766,7 @@
           <p:cNvPr id="21" name="">
             <a:extLst xmlns:a="http://schemas.openxmlformats.org/drawingml/2006/main">
               <a:ext uri="{FF2B5EF4-FFF2-40B4-BE49-F238E27FC236}">
-                <a16:creationId xmlns:a16="http://schemas.microsoft.com/office/drawing/2014/main" id="{7F3DAB6D-7AF9-470F-A40E-BCDCC5D584B2}"/>
+                <a16:creationId xmlns:a16="http://schemas.microsoft.com/office/drawing/2014/main" id="{B66F4045-3003-4DDE-A9A5-A98D3239C12E}"/>
               </a:ext>
             </a:extLst>
           </p:cNvPr>
@@ -12815,7 +12823,7 @@
           <p:cNvPr id="22" name="">
             <a:extLst xmlns:a="http://schemas.openxmlformats.org/drawingml/2006/main">
               <a:ext uri="{FF2B5EF4-FFF2-40B4-BE49-F238E27FC236}">
-                <a16:creationId xmlns:a16="http://schemas.microsoft.com/office/drawing/2014/main" id="{592D6815-6960-4E83-A9C8-AE988218AAFD}"/>
+                <a16:creationId xmlns:a16="http://schemas.microsoft.com/office/drawing/2014/main" id="{FE8BCF9F-7FBD-4C1D-AD2E-A6D2C0CC76B4}"/>
               </a:ext>
             </a:extLst>
           </p:cNvPr>
@@ -12870,7 +12878,7 @@
     </p:spTree>
     <p:extLst>
       <p:ext uri="{BB962C8B-B14F-4D97-AF65-F5344CB8AC3E}">
-        <p14:creationId xmlns:p14="http://schemas.microsoft.com/office/powerpoint/2010/main" val="427355789"/>
+        <p14:creationId xmlns:p14="http://schemas.microsoft.com/office/powerpoint/2010/main" val="2066779208"/>
       </p:ext>
     </p:extLst>
   </p:cSld>
@@ -13071,7 +13079,7 @@
           <p:cNvPr id="22" name="">
             <a:extLst xmlns:a="http://schemas.openxmlformats.org/drawingml/2006/main">
               <a:ext uri="{FF2B5EF4-FFF2-40B4-BE49-F238E27FC236}">
-                <a16:creationId xmlns:a16="http://schemas.microsoft.com/office/drawing/2014/main" id="{33E56736-45F9-435E-857E-C89B1DDDB388}"/>
+                <a16:creationId xmlns:a16="http://schemas.microsoft.com/office/drawing/2014/main" id="{2CA10606-7A94-4665-9FA0-5C9FFC91A65A}"/>
               </a:ext>
             </a:extLst>
           </p:cNvPr>
@@ -13103,7 +13111,7 @@
           <p:cNvPr id="2" name="">
             <a:extLst xmlns:a="http://schemas.openxmlformats.org/drawingml/2006/main">
               <a:ext uri="{FF2B5EF4-FFF2-40B4-BE49-F238E27FC236}">
-                <a16:creationId xmlns:a16="http://schemas.microsoft.com/office/drawing/2014/main" id="{7ABC8F60-7BDB-4859-B7EF-AC0419F45AFA}"/>
+                <a16:creationId xmlns:a16="http://schemas.microsoft.com/office/drawing/2014/main" id="{AF054401-CCDB-4B5D-8B43-3910AD2EEE3E}"/>
               </a:ext>
             </a:extLst>
           </p:cNvPr>
@@ -13160,7 +13168,7 @@
           <p:cNvPr id="3" name="">
             <a:extLst xmlns:a="http://schemas.openxmlformats.org/drawingml/2006/main">
               <a:ext uri="{FF2B5EF4-FFF2-40B4-BE49-F238E27FC236}">
-                <a16:creationId xmlns:a16="http://schemas.microsoft.com/office/drawing/2014/main" id="{B84DEC7C-5752-4E25-8A9C-E9BF9E05C60D}"/>
+                <a16:creationId xmlns:a16="http://schemas.microsoft.com/office/drawing/2014/main" id="{48E5FCDB-F652-4CB5-AD16-2D1D4A846B43}"/>
               </a:ext>
             </a:extLst>
           </p:cNvPr>
@@ -13192,7 +13200,7 @@
           <p:cNvPr id="4" name="">
             <a:extLst xmlns:a="http://schemas.openxmlformats.org/drawingml/2006/main">
               <a:ext uri="{FF2B5EF4-FFF2-40B4-BE49-F238E27FC236}">
-                <a16:creationId xmlns:a16="http://schemas.microsoft.com/office/drawing/2014/main" id="{8ED7F349-EE75-4859-A922-06289EE0E29D}"/>
+                <a16:creationId xmlns:a16="http://schemas.microsoft.com/office/drawing/2014/main" id="{0B8DD19A-4A52-481D-82F9-D93C3734FB61}"/>
               </a:ext>
             </a:extLst>
           </p:cNvPr>
@@ -13249,7 +13257,7 @@
           <p:cNvPr id="5" name="">
             <a:extLst xmlns:a="http://schemas.openxmlformats.org/drawingml/2006/main">
               <a:ext uri="{FF2B5EF4-FFF2-40B4-BE49-F238E27FC236}">
-                <a16:creationId xmlns:a16="http://schemas.microsoft.com/office/drawing/2014/main" id="{3400E844-E477-4722-9ACF-BC8B6A149722}"/>
+                <a16:creationId xmlns:a16="http://schemas.microsoft.com/office/drawing/2014/main" id="{B4282EB7-A43B-4B1C-93E5-EBC08F8BC3B7}"/>
               </a:ext>
             </a:extLst>
           </p:cNvPr>
@@ -13306,7 +13314,7 @@
           <p:cNvPr id="6" name="">
             <a:extLst xmlns:a="http://schemas.openxmlformats.org/drawingml/2006/main">
               <a:ext uri="{FF2B5EF4-FFF2-40B4-BE49-F238E27FC236}">
-                <a16:creationId xmlns:a16="http://schemas.microsoft.com/office/drawing/2014/main" id="{CC930C1B-6491-480C-B906-A49EB0F9EF19}"/>
+                <a16:creationId xmlns:a16="http://schemas.microsoft.com/office/drawing/2014/main" id="{A9B8B887-158C-47C7-A51F-32F0336A6D82}"/>
               </a:ext>
             </a:extLst>
           </p:cNvPr>
@@ -13363,7 +13371,7 @@
           <p:cNvPr id="7" name="">
             <a:extLst xmlns:a="http://schemas.openxmlformats.org/drawingml/2006/main">
               <a:ext uri="{FF2B5EF4-FFF2-40B4-BE49-F238E27FC236}">
-                <a16:creationId xmlns:a16="http://schemas.microsoft.com/office/drawing/2014/main" id="{C399924D-B8B3-4E8C-ABC5-600487758D8A}"/>
+                <a16:creationId xmlns:a16="http://schemas.microsoft.com/office/drawing/2014/main" id="{2D14869E-EFB8-4FD6-8682-7C6830BE2C08}"/>
               </a:ext>
             </a:extLst>
           </p:cNvPr>
@@ -13395,7 +13403,7 @@
           <p:cNvPr id="8" name="">
             <a:extLst xmlns:a="http://schemas.openxmlformats.org/drawingml/2006/main">
               <a:ext uri="{FF2B5EF4-FFF2-40B4-BE49-F238E27FC236}">
-                <a16:creationId xmlns:a16="http://schemas.microsoft.com/office/drawing/2014/main" id="{E07E6EAF-2478-4388-A408-98DD99FB0830}"/>
+                <a16:creationId xmlns:a16="http://schemas.microsoft.com/office/drawing/2014/main" id="{FB6607B6-9BBD-488A-9A11-61E483ECAFF4}"/>
               </a:ext>
             </a:extLst>
           </p:cNvPr>
@@ -13452,7 +13460,7 @@
           <p:cNvPr id="9" name="">
             <a:extLst xmlns:a="http://schemas.openxmlformats.org/drawingml/2006/main">
               <a:ext uri="{FF2B5EF4-FFF2-40B4-BE49-F238E27FC236}">
-                <a16:creationId xmlns:a16="http://schemas.microsoft.com/office/drawing/2014/main" id="{54364842-1CF6-43EC-B25A-67DF9ECAF4AE}"/>
+                <a16:creationId xmlns:a16="http://schemas.microsoft.com/office/drawing/2014/main" id="{90A32E02-F90F-45D8-B285-768E1231BD37}"/>
               </a:ext>
             </a:extLst>
           </p:cNvPr>
@@ -13509,7 +13517,7 @@
           <p:cNvPr id="10" name="">
             <a:extLst xmlns:a="http://schemas.openxmlformats.org/drawingml/2006/main">
               <a:ext uri="{FF2B5EF4-FFF2-40B4-BE49-F238E27FC236}">
-                <a16:creationId xmlns:a16="http://schemas.microsoft.com/office/drawing/2014/main" id="{1B58F373-36D0-4D2F-ADCE-5B92A105C03E}"/>
+                <a16:creationId xmlns:a16="http://schemas.microsoft.com/office/drawing/2014/main" id="{55ED6CD5-7257-457E-A07E-DC76A0F61CCD}"/>
               </a:ext>
             </a:extLst>
           </p:cNvPr>
@@ -13543,7 +13551,7 @@
           <p:cNvPr id="11" name="">
             <a:extLst xmlns:a="http://schemas.openxmlformats.org/drawingml/2006/main">
               <a:ext uri="{FF2B5EF4-FFF2-40B4-BE49-F238E27FC236}">
-                <a16:creationId xmlns:a16="http://schemas.microsoft.com/office/drawing/2014/main" id="{01F24986-3D4C-44DB-A254-17B6A2B38DF0}"/>
+                <a16:creationId xmlns:a16="http://schemas.microsoft.com/office/drawing/2014/main" id="{735F47D8-F33B-4F57-8457-ADA53A719881}"/>
               </a:ext>
             </a:extLst>
           </p:cNvPr>
@@ -13575,7 +13583,7 @@
           <p:cNvPr id="12" name="">
             <a:extLst xmlns:a="http://schemas.openxmlformats.org/drawingml/2006/main">
               <a:ext uri="{FF2B5EF4-FFF2-40B4-BE49-F238E27FC236}">
-                <a16:creationId xmlns:a16="http://schemas.microsoft.com/office/drawing/2014/main" id="{E6000C78-60E0-4A47-8D75-8ABCD293C530}"/>
+                <a16:creationId xmlns:a16="http://schemas.microsoft.com/office/drawing/2014/main" id="{C9DB587B-5C88-4A55-80EE-6FCD7143D9C8}"/>
               </a:ext>
             </a:extLst>
           </p:cNvPr>
@@ -13632,7 +13640,7 @@
           <p:cNvPr id="13" name="">
             <a:extLst xmlns:a="http://schemas.openxmlformats.org/drawingml/2006/main">
               <a:ext uri="{FF2B5EF4-FFF2-40B4-BE49-F238E27FC236}">
-                <a16:creationId xmlns:a16="http://schemas.microsoft.com/office/drawing/2014/main" id="{FF693AF2-A1B7-498D-B91D-794F4A033780}"/>
+                <a16:creationId xmlns:a16="http://schemas.microsoft.com/office/drawing/2014/main" id="{7B4177B7-B986-4FF1-A9F1-DC8C669CFEEF}"/>
               </a:ext>
             </a:extLst>
           </p:cNvPr>
@@ -13689,7 +13697,7 @@
           <p:cNvPr id="14" name="">
             <a:extLst xmlns:a="http://schemas.openxmlformats.org/drawingml/2006/main">
               <a:ext uri="{FF2B5EF4-FFF2-40B4-BE49-F238E27FC236}">
-                <a16:creationId xmlns:a16="http://schemas.microsoft.com/office/drawing/2014/main" id="{C4F73CC7-E334-48BA-8760-7FBF0F23D98E}"/>
+                <a16:creationId xmlns:a16="http://schemas.microsoft.com/office/drawing/2014/main" id="{57A24366-0363-4DA1-A08A-0BA69E907A63}"/>
               </a:ext>
             </a:extLst>
           </p:cNvPr>
@@ -13723,7 +13731,7 @@
           <p:cNvPr id="15" name="">
             <a:extLst xmlns:a="http://schemas.openxmlformats.org/drawingml/2006/main">
               <a:ext uri="{FF2B5EF4-FFF2-40B4-BE49-F238E27FC236}">
-                <a16:creationId xmlns:a16="http://schemas.microsoft.com/office/drawing/2014/main" id="{860F67C3-0177-40FD-8DE4-A7376A736905}"/>
+                <a16:creationId xmlns:a16="http://schemas.microsoft.com/office/drawing/2014/main" id="{FAE2091C-13AC-4DEA-B735-8497B6CBB329}"/>
               </a:ext>
             </a:extLst>
           </p:cNvPr>
@@ -13755,7 +13763,7 @@
           <p:cNvPr id="16" name="">
             <a:extLst xmlns:a="http://schemas.openxmlformats.org/drawingml/2006/main">
               <a:ext uri="{FF2B5EF4-FFF2-40B4-BE49-F238E27FC236}">
-                <a16:creationId xmlns:a16="http://schemas.microsoft.com/office/drawing/2014/main" id="{E2AF4F94-A0A1-4626-92ED-2B4860C0C60C}"/>
+                <a16:creationId xmlns:a16="http://schemas.microsoft.com/office/drawing/2014/main" id="{2F8C5172-EC93-4F27-A72B-43ADE22E39B6}"/>
               </a:ext>
             </a:extLst>
           </p:cNvPr>
@@ -13812,7 +13820,7 @@
           <p:cNvPr id="17" name="">
             <a:extLst xmlns:a="http://schemas.openxmlformats.org/drawingml/2006/main">
               <a:ext uri="{FF2B5EF4-FFF2-40B4-BE49-F238E27FC236}">
-                <a16:creationId xmlns:a16="http://schemas.microsoft.com/office/drawing/2014/main" id="{FC0D0310-AE76-482C-A141-D3C8124E7E37}"/>
+                <a16:creationId xmlns:a16="http://schemas.microsoft.com/office/drawing/2014/main" id="{C8945CE6-277E-4CF3-84C0-CC53C14E0698}"/>
               </a:ext>
             </a:extLst>
           </p:cNvPr>
@@ -13869,7 +13877,7 @@
           <p:cNvPr id="18" name="">
             <a:extLst xmlns:a="http://schemas.openxmlformats.org/drawingml/2006/main">
               <a:ext uri="{FF2B5EF4-FFF2-40B4-BE49-F238E27FC236}">
-                <a16:creationId xmlns:a16="http://schemas.microsoft.com/office/drawing/2014/main" id="{EECD3449-A414-4E23-AA87-D0FC64D6B091}"/>
+                <a16:creationId xmlns:a16="http://schemas.microsoft.com/office/drawing/2014/main" id="{E8855E77-03BB-4F21-BABA-94A0F8BC0C85}"/>
               </a:ext>
             </a:extLst>
           </p:cNvPr>
@@ -13903,7 +13911,7 @@
           <p:cNvPr id="19" name="">
             <a:extLst xmlns:a="http://schemas.openxmlformats.org/drawingml/2006/main">
               <a:ext uri="{FF2B5EF4-FFF2-40B4-BE49-F238E27FC236}">
-                <a16:creationId xmlns:a16="http://schemas.microsoft.com/office/drawing/2014/main" id="{967BB263-B26B-4CB7-90C0-EAA22E206782}"/>
+                <a16:creationId xmlns:a16="http://schemas.microsoft.com/office/drawing/2014/main" id="{0F41D327-7BB2-4FE0-90E4-2597AB8A3456}"/>
               </a:ext>
             </a:extLst>
           </p:cNvPr>
@@ -13935,7 +13943,7 @@
           <p:cNvPr id="20" name="">
             <a:extLst xmlns:a="http://schemas.openxmlformats.org/drawingml/2006/main">
               <a:ext uri="{FF2B5EF4-FFF2-40B4-BE49-F238E27FC236}">
-                <a16:creationId xmlns:a16="http://schemas.microsoft.com/office/drawing/2014/main" id="{C807EC45-919F-4A7F-BF47-2127FB550D72}"/>
+                <a16:creationId xmlns:a16="http://schemas.microsoft.com/office/drawing/2014/main" id="{EF11093D-4A92-4388-80EC-59A7E37E8A64}"/>
               </a:ext>
             </a:extLst>
           </p:cNvPr>
@@ -13992,7 +14000,7 @@
           <p:cNvPr id="21" name="">
             <a:extLst xmlns:a="http://schemas.openxmlformats.org/drawingml/2006/main">
               <a:ext uri="{FF2B5EF4-FFF2-40B4-BE49-F238E27FC236}">
-                <a16:creationId xmlns:a16="http://schemas.microsoft.com/office/drawing/2014/main" id="{E0DF92FA-8F9D-45DF-AC06-EAE764F4D873}"/>
+                <a16:creationId xmlns:a16="http://schemas.microsoft.com/office/drawing/2014/main" id="{3B84F7F4-C144-4531-AC49-00CB1D0CD472}"/>
               </a:ext>
             </a:extLst>
           </p:cNvPr>
@@ -14047,7 +14055,7 @@
     </p:spTree>
     <p:extLst>
       <p:ext uri="{BB962C8B-B14F-4D97-AF65-F5344CB8AC3E}">
-        <p14:creationId xmlns:p14="http://schemas.microsoft.com/office/powerpoint/2010/main" val="1530400476"/>
+        <p14:creationId xmlns:p14="http://schemas.microsoft.com/office/powerpoint/2010/main" val="1478870813"/>
       </p:ext>
     </p:extLst>
   </p:cSld>
